--- a/outputs/recap/MIPS-platform-BoM-EN-DRAFT.pptx
+++ b/outputs/recap/MIPS-platform-BoM-EN-DRAFT.pptx
@@ -14,9 +14,10 @@
     <p:sldId id="262" r:id="rId8"/>
     <p:sldId id="263" r:id="rId9"/>
     <p:sldId id="264" r:id="rId10"/>
+    <p:sldId id="265" r:id="rId11"/>
   </p:sldIdLst>
   <p:notesMasterIdLst>
-    <p:notesMasterId r:id="rId11"/>
+    <p:notesMasterId r:id="rId12"/>
   </p:notesMasterIdLst>
   <p:sldSz cx="12192000" cy="6858000"/>
   <p:notesSz cx="6858000" cy="12192000"/>
@@ -115,13 +116,13 @@
   <p:extLst>
     <p:ext uri="{521415D9-36F7-43E2-AB2F-B90AF26B5E84}">
       <p14:sectionLst xmlns:p14="http://schemas.microsoft.com/office/powerpoint/2010/main">
-        <p14:section name="Overview" id="{ed75ec3a-d44b-1c88-d2b2-f114100526bf}">
+        <p14:section name="Overview" id="{6bc2731f-356b-27aa-f8bb-5e22d4e40aaf}">
           <p14:sldIdLst>
             <p14:sldId id="256"/>
             <p14:sldId id="257"/>
           </p14:sldIdLst>
         </p14:section>
-        <p14:section name="Platform" id="{6ab2b659-8630-46c6-a0b5-0cc4dfe556c3}">
+        <p14:section name="Platform" id="{3b9134ec-61fd-ae36-7829-5df14e6e48b7}">
           <p14:sldIdLst>
             <p14:sldId id="258"/>
             <p14:sldId id="259"/>
@@ -129,11 +130,12 @@
             <p14:sldId id="261"/>
           </p14:sldIdLst>
         </p14:section>
-        <p14:section name="Funds and evidence" id="{4c672e53-bb45-4d42-2654-898f8b7a2628}">
+        <p14:section name="Funds and evidence" id="{81423aae-6eb2-4098-5153-9c63bf8b28c4}">
           <p14:sldIdLst>
             <p14:sldId id="262"/>
             <p14:sldId id="263"/>
             <p14:sldId id="264"/>
+            <p14:sldId id="265"/>
           </p14:sldIdLst>
         </p14:section>
       </p14:sectionLst>
@@ -582,6 +584,94 @@
 </p:notes>
 </file>
 
+<file path=ppt/notesSlides/notesSlide10.xml><?xml version="1.0" encoding="utf-8"?>
+<p:notes xmlns:a="http://schemas.openxmlformats.org/drawingml/2006/main" xmlns:r="http://schemas.openxmlformats.org/officeDocument/2006/relationships" xmlns:p="http://schemas.openxmlformats.org/presentationml/2006/main">
+  <p:cSld>
+    <p:spTree>
+      <p:nvGrpSpPr>
+        <p:cNvPr id="1" name=""/>
+        <p:cNvGrpSpPr/>
+        <p:nvPr/>
+      </p:nvGrpSpPr>
+      <p:grpSpPr>
+        <a:xfrm>
+          <a:off x="0" y="0"/>
+          <a:ext cx="0" cy="0"/>
+          <a:chOff x="0" y="0"/>
+          <a:chExt cx="0" cy="0"/>
+        </a:xfrm>
+      </p:grpSpPr>
+      <p:sp>
+        <p:nvSpPr>
+          <p:cNvPr id="2" name="Slide Image Placeholder 1"/>
+          <p:cNvSpPr>
+            <a:spLocks noGrp="1" noRot="1" noChangeAspect="1"/>
+          </p:cNvSpPr>
+          <p:nvPr>
+            <p:ph type="sldImg"/>
+          </p:nvPr>
+        </p:nvSpPr>
+        <p:spPr/>
+      </p:sp>
+      <p:sp>
+        <p:nvSpPr>
+          <p:cNvPr id="3" name="Notes Placeholder 2"/>
+          <p:cNvSpPr>
+            <a:spLocks noGrp="1"/>
+          </p:cNvSpPr>
+          <p:nvPr>
+            <p:ph type="body" idx="1"/>
+          </p:nvPr>
+        </p:nvSpPr>
+        <p:spPr/>
+        <p:txBody>
+          <a:bodyPr/>
+          <a:lstStyle/>
+          <a:p>
+            <a:r>
+              <a:rPr lang="en-US" dirty="0"/>
+              <a:t>Commit to dates only once the fund-flow model and the resources are decided.</a:t>
+            </a:r>
+            <a:endParaRPr lang="en-US" dirty="0"/>
+          </a:p>
+        </p:txBody>
+      </p:sp>
+      <p:sp>
+        <p:nvSpPr>
+          <p:cNvPr id="4" name="Slide Number Placeholder 3"/>
+          <p:cNvSpPr>
+            <a:spLocks noGrp="1"/>
+          </p:cNvSpPr>
+          <p:nvPr>
+            <p:ph type="sldNum" sz="quarter" idx="10"/>
+          </p:nvPr>
+        </p:nvSpPr>
+        <p:spPr/>
+        <p:txBody>
+          <a:bodyPr/>
+          <a:lstStyle/>
+          <a:p>
+            <a:fld id="{F7021451-1387-4CA6-816F-3879F97B5CBC}" type="slidenum">
+              <a:rPr lang="en-US"/>
+              <a:t>10</a:t>
+            </a:fld>
+            <a:endParaRPr lang="en-US"/>
+          </a:p>
+        </p:txBody>
+      </p:sp>
+    </p:spTree>
+    <p:extLst>
+      <p:ext uri="{BB962C8B-B14F-4D97-AF65-F5344CB8AC3E}">
+        <p14:creationId xmlns:p14="http://schemas.microsoft.com/office/powerpoint/2010/main" val="1024086991"/>
+      </p:ext>
+    </p:extLst>
+  </p:cSld>
+  <p:clrMapOvr>
+    <a:masterClrMapping/>
+  </p:clrMapOvr>
+</p:notes>
+</file>
+
 <file path=ppt/notesSlides/notesSlide2.xml><?xml version="1.0" encoding="utf-8"?>
 <p:notes xmlns:a="http://schemas.openxmlformats.org/drawingml/2006/main" xmlns:r="http://schemas.openxmlformats.org/officeDocument/2006/relationships" xmlns:p="http://schemas.openxmlformats.org/presentationml/2006/main">
   <p:cSld>
@@ -1244,7 +1334,7 @@
           <a:p>
             <a:r>
               <a:rPr lang="en-US" dirty="0"/>
-              <a:t>Commit to dates only once the fund-flow model and the resources are decided.</a:t>
+              <a:t>INTERNAL. The tests led to two security fixes in the prototype (sign-in lockout per account instead of per IP; password-change time stored to the microsecond). They are deliberately not described here: development history, not a control. Mention them only if asked how the tests were used. The "2FA mandatory for finance and admin" rule is not covered by the automated tests: the test configuration switches it off.</a:t>
             </a:r>
             <a:endParaRPr lang="en-US" dirty="0"/>
           </a:p>
@@ -2039,6 +2129,894 @@
 </p:sld>
 </file>
 
+<file path=ppt/slides/slide10.xml><?xml version="1.0" encoding="utf-8"?>
+<p:sld xmlns:a="http://schemas.openxmlformats.org/drawingml/2006/main" xmlns:r="http://schemas.openxmlformats.org/officeDocument/2006/relationships" xmlns:p="http://schemas.openxmlformats.org/presentationml/2006/main">
+  <p:cSld name="Slide 10">
+    <p:spTree>
+      <p:nvGrpSpPr>
+        <p:cNvPr id="1" name=""/>
+        <p:cNvGrpSpPr/>
+        <p:nvPr/>
+      </p:nvGrpSpPr>
+      <p:grpSpPr>
+        <a:xfrm>
+          <a:off x="0" y="0"/>
+          <a:ext cx="0" cy="0"/>
+          <a:chOff x="0" y="0"/>
+          <a:chExt cx="0" cy="0"/>
+        </a:xfrm>
+      </p:grpSpPr>
+      <p:sp>
+        <p:nvSpPr>
+          <p:cNvPr id="2" name="Text 0"/>
+          <p:cNvSpPr/>
+          <p:nvPr>
+            <p:ph idx="100" type="title" hasCustomPrompt="1"/>
+          </p:nvPr>
+        </p:nvSpPr>
+        <p:spPr>
+          <a:xfrm>
+            <a:off x="457200" y="320040"/>
+            <a:ext cx="11247120" cy="731520"/>
+          </a:xfrm>
+          <a:prstGeom prst="rect">
+            <a:avLst/>
+          </a:prstGeom>
+          <a:noFill/>
+          <a:ln/>
+        </p:spPr>
+        <p:txBody>
+          <a:bodyPr wrap="square" lIns="0" tIns="0" rIns="0" bIns="0" rtlCol="0" anchor="ctr"/>
+          <a:lstStyle/>
+          <a:p>
+            <a:pPr algn="l" indent="0" marL="0">
+              <a:buNone/>
+            </a:pPr>
+            <a:r>
+              <a:rPr lang="en-US" sz="3000" b="1" dirty="0">
+                <a:solidFill>
+                  <a:schemeClr val="tx1"/>
+                </a:solidFill>
+              </a:rPr>
+              <a:t>Not yet in place</a:t>
+            </a:r>
+            <a:endParaRPr lang="en-US" sz="3000" dirty="0"/>
+          </a:p>
+        </p:txBody>
+      </p:sp>
+      <p:sp>
+        <p:nvSpPr>
+          <p:cNvPr id="3" name="gap-0"/>
+          <p:cNvSpPr/>
+          <p:nvPr/>
+        </p:nvSpPr>
+        <p:spPr>
+          <a:xfrm>
+            <a:off x="457200" y="1280160"/>
+            <a:ext cx="5440680" cy="1325880"/>
+          </a:xfrm>
+          <a:prstGeom prst="roundRect">
+            <a:avLst>
+              <a:gd name="adj" fmla="val 5517"/>
+            </a:avLst>
+          </a:prstGeom>
+          <a:solidFill>
+            <a:schemeClr val="bg2"/>
+          </a:solidFill>
+          <a:ln w="9525">
+            <a:solidFill>
+              <a:schemeClr val="bg2"/>
+            </a:solidFill>
+            <a:prstDash val="solid"/>
+          </a:ln>
+        </p:spPr>
+      </p:sp>
+      <p:sp>
+        <p:nvSpPr>
+          <p:cNvPr id="4" name="gdot-0"/>
+          <p:cNvSpPr/>
+          <p:nvPr/>
+        </p:nvSpPr>
+        <p:spPr>
+          <a:xfrm>
+            <a:off x="685800" y="1554480"/>
+            <a:ext cx="292608" cy="292608"/>
+          </a:xfrm>
+          <a:prstGeom prst="ellipse">
+            <a:avLst/>
+          </a:prstGeom>
+          <a:solidFill>
+            <a:schemeClr val="accent5"/>
+          </a:solidFill>
+          <a:ln w="12700">
+            <a:solidFill>
+              <a:schemeClr val="accent5"/>
+            </a:solidFill>
+            <a:prstDash val="solid"/>
+          </a:ln>
+        </p:spPr>
+      </p:sp>
+      <p:sp>
+        <p:nvSpPr>
+          <p:cNvPr id="5" name="Text 3"/>
+          <p:cNvSpPr txBox="1"/>
+          <p:nvPr/>
+        </p:nvSpPr>
+        <p:spPr>
+          <a:xfrm>
+            <a:off x="1097280" y="1444752"/>
+            <a:ext cx="4663440" cy="457200"/>
+          </a:xfrm>
+          <a:prstGeom prst="rect">
+            <a:avLst/>
+          </a:prstGeom>
+          <a:noFill/>
+          <a:ln/>
+        </p:spPr>
+        <p:txBody>
+          <a:bodyPr wrap="square" lIns="1016" tIns="1016" rIns="1016" bIns="1016" rtlCol="0" anchor="t"/>
+          <a:lstStyle/>
+          <a:p>
+            <a:pPr algn="l" indent="0" marL="0">
+              <a:buNone/>
+            </a:pPr>
+            <a:r>
+              <a:rPr lang="en-US" sz="1700" b="1" dirty="0">
+                <a:solidFill>
+                  <a:schemeClr val="tx1"/>
+                </a:solidFill>
+              </a:rPr>
+              <a:t>Safeguarding reconciliation</a:t>
+            </a:r>
+            <a:endParaRPr lang="en-US" sz="1700" dirty="0"/>
+          </a:p>
+        </p:txBody>
+      </p:sp>
+      <p:sp>
+        <p:nvSpPr>
+          <p:cNvPr id="6" name="Text 4"/>
+          <p:cNvSpPr txBox="1"/>
+          <p:nvPr/>
+        </p:nvSpPr>
+        <p:spPr>
+          <a:xfrm>
+            <a:off x="1097280" y="1920240"/>
+            <a:ext cx="4663440" cy="640080"/>
+          </a:xfrm>
+          <a:prstGeom prst="rect">
+            <a:avLst/>
+          </a:prstGeom>
+          <a:noFill/>
+          <a:ln/>
+        </p:spPr>
+        <p:txBody>
+          <a:bodyPr wrap="square" lIns="1016" tIns="1016" rIns="1016" bIns="1016" rtlCol="0" anchor="t"/>
+          <a:lstStyle/>
+          <a:p>
+            <a:pPr algn="l" indent="0" marL="0">
+              <a:buNone/>
+            </a:pPr>
+            <a:r>
+              <a:rPr lang="en-US" sz="1300" dirty="0">
+                <a:solidFill>
+                  <a:schemeClr val="tx1"/>
+                </a:solidFill>
+              </a:rPr>
+              <a:t>Daily bank-to-ledger-to-merchant-funds reconciliation, needed only if merchant funds are collected (model B).</a:t>
+            </a:r>
+            <a:endParaRPr lang="en-US" sz="1300" dirty="0"/>
+          </a:p>
+        </p:txBody>
+      </p:sp>
+      <p:sp>
+        <p:nvSpPr>
+          <p:cNvPr id="7" name="gap-1"/>
+          <p:cNvSpPr/>
+          <p:nvPr/>
+        </p:nvSpPr>
+        <p:spPr>
+          <a:xfrm>
+            <a:off x="6126480" y="1280160"/>
+            <a:ext cx="5440680" cy="1325880"/>
+          </a:xfrm>
+          <a:prstGeom prst="roundRect">
+            <a:avLst>
+              <a:gd name="adj" fmla="val 5517"/>
+            </a:avLst>
+          </a:prstGeom>
+          <a:solidFill>
+            <a:schemeClr val="bg2"/>
+          </a:solidFill>
+          <a:ln w="9525">
+            <a:solidFill>
+              <a:schemeClr val="bg2"/>
+            </a:solidFill>
+            <a:prstDash val="solid"/>
+          </a:ln>
+        </p:spPr>
+      </p:sp>
+      <p:sp>
+        <p:nvSpPr>
+          <p:cNvPr id="8" name="gdot-1"/>
+          <p:cNvSpPr/>
+          <p:nvPr/>
+        </p:nvSpPr>
+        <p:spPr>
+          <a:xfrm>
+            <a:off x="6355080" y="1554480"/>
+            <a:ext cx="292608" cy="292608"/>
+          </a:xfrm>
+          <a:prstGeom prst="ellipse">
+            <a:avLst/>
+          </a:prstGeom>
+          <a:solidFill>
+            <a:schemeClr val="accent5"/>
+          </a:solidFill>
+          <a:ln w="12700">
+            <a:solidFill>
+              <a:schemeClr val="accent5"/>
+            </a:solidFill>
+            <a:prstDash val="solid"/>
+          </a:ln>
+        </p:spPr>
+      </p:sp>
+      <p:sp>
+        <p:nvSpPr>
+          <p:cNvPr id="9" name="Text 7"/>
+          <p:cNvSpPr txBox="1"/>
+          <p:nvPr/>
+        </p:nvSpPr>
+        <p:spPr>
+          <a:xfrm>
+            <a:off x="6766560" y="1444752"/>
+            <a:ext cx="4663440" cy="457200"/>
+          </a:xfrm>
+          <a:prstGeom prst="rect">
+            <a:avLst/>
+          </a:prstGeom>
+          <a:noFill/>
+          <a:ln/>
+        </p:spPr>
+        <p:txBody>
+          <a:bodyPr wrap="square" lIns="1016" tIns="1016" rIns="1016" bIns="1016" rtlCol="0" anchor="t"/>
+          <a:lstStyle/>
+          <a:p>
+            <a:pPr algn="l" indent="0" marL="0">
+              <a:buNone/>
+            </a:pPr>
+            <a:r>
+              <a:rPr lang="en-US" sz="1700" b="1" dirty="0">
+                <a:solidFill>
+                  <a:schemeClr val="tx1"/>
+                </a:solidFill>
+              </a:rPr>
+              <a:t>Transaction monitoring</a:t>
+            </a:r>
+            <a:endParaRPr lang="en-US" sz="1700" dirty="0"/>
+          </a:p>
+        </p:txBody>
+      </p:sp>
+      <p:sp>
+        <p:nvSpPr>
+          <p:cNvPr id="10" name="Text 8"/>
+          <p:cNvSpPr txBox="1"/>
+          <p:nvPr/>
+        </p:nvSpPr>
+        <p:spPr>
+          <a:xfrm>
+            <a:off x="6766560" y="1920240"/>
+            <a:ext cx="4663440" cy="640080"/>
+          </a:xfrm>
+          <a:prstGeom prst="rect">
+            <a:avLst/>
+          </a:prstGeom>
+          <a:noFill/>
+          <a:ln/>
+        </p:spPr>
+        <p:txBody>
+          <a:bodyPr wrap="square" lIns="1016" tIns="1016" rIns="1016" bIns="1016" rtlCol="0" anchor="t"/>
+          <a:lstStyle/>
+          <a:p>
+            <a:pPr algn="l" indent="0" marL="0">
+              <a:buNone/>
+            </a:pPr>
+            <a:r>
+              <a:rPr lang="en-US" sz="1300" dirty="0">
+                <a:solidFill>
+                  <a:schemeClr val="tx1"/>
+                </a:solidFill>
+              </a:rPr>
+              <a:t>Rules, alerts and case investigation for AML and fraud.</a:t>
+            </a:r>
+            <a:endParaRPr lang="en-US" sz="1300" dirty="0"/>
+          </a:p>
+        </p:txBody>
+      </p:sp>
+      <p:sp>
+        <p:nvSpPr>
+          <p:cNvPr id="11" name="gap-2"/>
+          <p:cNvSpPr/>
+          <p:nvPr/>
+        </p:nvSpPr>
+        <p:spPr>
+          <a:xfrm>
+            <a:off x="457200" y="2834640"/>
+            <a:ext cx="5440680" cy="1325880"/>
+          </a:xfrm>
+          <a:prstGeom prst="roundRect">
+            <a:avLst>
+              <a:gd name="adj" fmla="val 5517"/>
+            </a:avLst>
+          </a:prstGeom>
+          <a:solidFill>
+            <a:schemeClr val="bg2"/>
+          </a:solidFill>
+          <a:ln w="9525">
+            <a:solidFill>
+              <a:schemeClr val="bg2"/>
+            </a:solidFill>
+            <a:prstDash val="solid"/>
+          </a:ln>
+        </p:spPr>
+      </p:sp>
+      <p:sp>
+        <p:nvSpPr>
+          <p:cNvPr id="12" name="gdot-2"/>
+          <p:cNvSpPr/>
+          <p:nvPr/>
+        </p:nvSpPr>
+        <p:spPr>
+          <a:xfrm>
+            <a:off x="685800" y="3108960"/>
+            <a:ext cx="292608" cy="292608"/>
+          </a:xfrm>
+          <a:prstGeom prst="ellipse">
+            <a:avLst/>
+          </a:prstGeom>
+          <a:solidFill>
+            <a:schemeClr val="accent5"/>
+          </a:solidFill>
+          <a:ln w="12700">
+            <a:solidFill>
+              <a:schemeClr val="accent5"/>
+            </a:solidFill>
+            <a:prstDash val="solid"/>
+          </a:ln>
+        </p:spPr>
+      </p:sp>
+      <p:sp>
+        <p:nvSpPr>
+          <p:cNvPr id="13" name="Text 11"/>
+          <p:cNvSpPr txBox="1"/>
+          <p:nvPr/>
+        </p:nvSpPr>
+        <p:spPr>
+          <a:xfrm>
+            <a:off x="1097280" y="2999232"/>
+            <a:ext cx="4663440" cy="457200"/>
+          </a:xfrm>
+          <a:prstGeom prst="rect">
+            <a:avLst/>
+          </a:prstGeom>
+          <a:noFill/>
+          <a:ln/>
+        </p:spPr>
+        <p:txBody>
+          <a:bodyPr wrap="square" lIns="1016" tIns="1016" rIns="1016" bIns="1016" rtlCol="0" anchor="t"/>
+          <a:lstStyle/>
+          <a:p>
+            <a:pPr algn="l" indent="0" marL="0">
+              <a:buNone/>
+            </a:pPr>
+            <a:r>
+              <a:rPr lang="en-US" sz="1700" b="1" dirty="0">
+                <a:solidFill>
+                  <a:schemeClr val="tx1"/>
+                </a:solidFill>
+              </a:rPr>
+              <a:t>Refunds, chargebacks, disputes</a:t>
+            </a:r>
+            <a:endParaRPr lang="en-US" sz="1700" dirty="0"/>
+          </a:p>
+        </p:txBody>
+      </p:sp>
+      <p:sp>
+        <p:nvSpPr>
+          <p:cNvPr id="14" name="Text 12"/>
+          <p:cNvSpPr txBox="1"/>
+          <p:nvPr/>
+        </p:nvSpPr>
+        <p:spPr>
+          <a:xfrm>
+            <a:off x="1097280" y="3474720"/>
+            <a:ext cx="4663440" cy="640080"/>
+          </a:xfrm>
+          <a:prstGeom prst="rect">
+            <a:avLst/>
+          </a:prstGeom>
+          <a:noFill/>
+          <a:ln/>
+        </p:spPr>
+        <p:txBody>
+          <a:bodyPr wrap="square" lIns="1016" tIns="1016" rIns="1016" bIns="1016" rtlCol="0" anchor="t"/>
+          <a:lstStyle/>
+          <a:p>
+            <a:pPr algn="l" indent="0" marL="0">
+              <a:buNone/>
+            </a:pPr>
+            <a:r>
+              <a:rPr lang="en-US" sz="1300" dirty="0">
+                <a:solidFill>
+                  <a:schemeClr val="tx1"/>
+                </a:solidFill>
+              </a:rPr>
+              <a:t>Registers, statuses and deadlines.</a:t>
+            </a:r>
+            <a:endParaRPr lang="en-US" sz="1300" dirty="0"/>
+          </a:p>
+        </p:txBody>
+      </p:sp>
+      <p:sp>
+        <p:nvSpPr>
+          <p:cNvPr id="15" name="gap-3"/>
+          <p:cNvSpPr/>
+          <p:nvPr/>
+        </p:nvSpPr>
+        <p:spPr>
+          <a:xfrm>
+            <a:off x="6126480" y="2834640"/>
+            <a:ext cx="5440680" cy="1325880"/>
+          </a:xfrm>
+          <a:prstGeom prst="roundRect">
+            <a:avLst>
+              <a:gd name="adj" fmla="val 5517"/>
+            </a:avLst>
+          </a:prstGeom>
+          <a:solidFill>
+            <a:schemeClr val="bg2"/>
+          </a:solidFill>
+          <a:ln w="9525">
+            <a:solidFill>
+              <a:schemeClr val="bg2"/>
+            </a:solidFill>
+            <a:prstDash val="solid"/>
+          </a:ln>
+        </p:spPr>
+      </p:sp>
+      <p:sp>
+        <p:nvSpPr>
+          <p:cNvPr id="16" name="gdot-3"/>
+          <p:cNvSpPr/>
+          <p:nvPr/>
+        </p:nvSpPr>
+        <p:spPr>
+          <a:xfrm>
+            <a:off x="6355080" y="3108960"/>
+            <a:ext cx="292608" cy="292608"/>
+          </a:xfrm>
+          <a:prstGeom prst="ellipse">
+            <a:avLst/>
+          </a:prstGeom>
+          <a:solidFill>
+            <a:schemeClr val="accent5"/>
+          </a:solidFill>
+          <a:ln w="12700">
+            <a:solidFill>
+              <a:schemeClr val="accent5"/>
+            </a:solidFill>
+            <a:prstDash val="solid"/>
+          </a:ln>
+        </p:spPr>
+      </p:sp>
+      <p:sp>
+        <p:nvSpPr>
+          <p:cNvPr id="17" name="Text 15"/>
+          <p:cNvSpPr txBox="1"/>
+          <p:nvPr/>
+        </p:nvSpPr>
+        <p:spPr>
+          <a:xfrm>
+            <a:off x="6766560" y="2999232"/>
+            <a:ext cx="4663440" cy="457200"/>
+          </a:xfrm>
+          <a:prstGeom prst="rect">
+            <a:avLst/>
+          </a:prstGeom>
+          <a:noFill/>
+          <a:ln/>
+        </p:spPr>
+        <p:txBody>
+          <a:bodyPr wrap="square" lIns="1016" tIns="1016" rIns="1016" bIns="1016" rtlCol="0" anchor="t"/>
+          <a:lstStyle/>
+          <a:p>
+            <a:pPr algn="l" indent="0" marL="0">
+              <a:buNone/>
+            </a:pPr>
+            <a:r>
+              <a:rPr lang="en-US" sz="1700" b="1" dirty="0">
+                <a:solidFill>
+                  <a:schemeClr val="tx1"/>
+                </a:solidFill>
+              </a:rPr>
+              <a:t>Complaints handling</a:t>
+            </a:r>
+            <a:endParaRPr lang="en-US" sz="1700" dirty="0"/>
+          </a:p>
+        </p:txBody>
+      </p:sp>
+      <p:sp>
+        <p:nvSpPr>
+          <p:cNvPr id="18" name="Text 16"/>
+          <p:cNvSpPr txBox="1"/>
+          <p:nvPr/>
+        </p:nvSpPr>
+        <p:spPr>
+          <a:xfrm>
+            <a:off x="6766560" y="3474720"/>
+            <a:ext cx="4663440" cy="640080"/>
+          </a:xfrm>
+          <a:prstGeom prst="rect">
+            <a:avLst/>
+          </a:prstGeom>
+          <a:noFill/>
+          <a:ln/>
+        </p:spPr>
+        <p:txBody>
+          <a:bodyPr wrap="square" lIns="1016" tIns="1016" rIns="1016" bIns="1016" rtlCol="0" anchor="t"/>
+          <a:lstStyle/>
+          <a:p>
+            <a:pPr algn="l" indent="0" marL="0">
+              <a:buNone/>
+            </a:pPr>
+            <a:r>
+              <a:rPr lang="en-US" sz="1300" dirty="0">
+                <a:solidFill>
+                  <a:schemeClr val="tx1"/>
+                </a:solidFill>
+              </a:rPr>
+              <a:t>Register, response times, escalation.</a:t>
+            </a:r>
+            <a:endParaRPr lang="en-US" sz="1300" dirty="0"/>
+          </a:p>
+        </p:txBody>
+      </p:sp>
+      <p:sp>
+        <p:nvSpPr>
+          <p:cNvPr id="19" name="gap-4"/>
+          <p:cNvSpPr/>
+          <p:nvPr/>
+        </p:nvSpPr>
+        <p:spPr>
+          <a:xfrm>
+            <a:off x="457200" y="4389120"/>
+            <a:ext cx="5440680" cy="1325880"/>
+          </a:xfrm>
+          <a:prstGeom prst="roundRect">
+            <a:avLst>
+              <a:gd name="adj" fmla="val 5517"/>
+            </a:avLst>
+          </a:prstGeom>
+          <a:solidFill>
+            <a:schemeClr val="bg2"/>
+          </a:solidFill>
+          <a:ln w="9525">
+            <a:solidFill>
+              <a:schemeClr val="bg2"/>
+            </a:solidFill>
+            <a:prstDash val="solid"/>
+          </a:ln>
+        </p:spPr>
+      </p:sp>
+      <p:sp>
+        <p:nvSpPr>
+          <p:cNvPr id="20" name="gdot-4"/>
+          <p:cNvSpPr/>
+          <p:nvPr/>
+        </p:nvSpPr>
+        <p:spPr>
+          <a:xfrm>
+            <a:off x="685800" y="4663440"/>
+            <a:ext cx="292608" cy="292608"/>
+          </a:xfrm>
+          <a:prstGeom prst="ellipse">
+            <a:avLst/>
+          </a:prstGeom>
+          <a:solidFill>
+            <a:schemeClr val="accent5"/>
+          </a:solidFill>
+          <a:ln w="12700">
+            <a:solidFill>
+              <a:schemeClr val="accent5"/>
+            </a:solidFill>
+            <a:prstDash val="solid"/>
+          </a:ln>
+        </p:spPr>
+      </p:sp>
+      <p:sp>
+        <p:nvSpPr>
+          <p:cNvPr id="21" name="Text 19"/>
+          <p:cNvSpPr txBox="1"/>
+          <p:nvPr/>
+        </p:nvSpPr>
+        <p:spPr>
+          <a:xfrm>
+            <a:off x="1097280" y="4553712"/>
+            <a:ext cx="4663440" cy="457200"/>
+          </a:xfrm>
+          <a:prstGeom prst="rect">
+            <a:avLst/>
+          </a:prstGeom>
+          <a:noFill/>
+          <a:ln/>
+        </p:spPr>
+        <p:txBody>
+          <a:bodyPr wrap="square" lIns="1016" tIns="1016" rIns="1016" bIns="1016" rtlCol="0" anchor="t"/>
+          <a:lstStyle/>
+          <a:p>
+            <a:pPr algn="l" indent="0" marL="0">
+              <a:buNone/>
+            </a:pPr>
+            <a:r>
+              <a:rPr lang="en-US" sz="1700" b="1" dirty="0">
+                <a:solidFill>
+                  <a:schemeClr val="tx1"/>
+                </a:solidFill>
+              </a:rPr>
+              <a:t>Automated sanctions / PEP screening</a:t>
+            </a:r>
+            <a:endParaRPr lang="en-US" sz="1700" dirty="0"/>
+          </a:p>
+        </p:txBody>
+      </p:sp>
+      <p:sp>
+        <p:nvSpPr>
+          <p:cNvPr id="22" name="Text 20"/>
+          <p:cNvSpPr txBox="1"/>
+          <p:nvPr/>
+        </p:nvSpPr>
+        <p:spPr>
+          <a:xfrm>
+            <a:off x="1097280" y="5029200"/>
+            <a:ext cx="4663440" cy="640080"/>
+          </a:xfrm>
+          <a:prstGeom prst="rect">
+            <a:avLst/>
+          </a:prstGeom>
+          <a:noFill/>
+          <a:ln/>
+        </p:spPr>
+        <p:txBody>
+          <a:bodyPr wrap="square" lIns="1016" tIns="1016" rIns="1016" bIns="1016" rtlCol="0" anchor="t"/>
+          <a:lstStyle/>
+          <a:p>
+            <a:pPr algn="l" indent="0" marL="0">
+              <a:buNone/>
+            </a:pPr>
+            <a:r>
+              <a:rPr lang="en-US" sz="1300" dirty="0">
+                <a:solidFill>
+                  <a:schemeClr val="tx1"/>
+                </a:solidFill>
+              </a:rPr>
+              <a:t>Provider integration, adverse media, ongoing re-screening.</a:t>
+            </a:r>
+            <a:endParaRPr lang="en-US" sz="1300" dirty="0"/>
+          </a:p>
+        </p:txBody>
+      </p:sp>
+      <p:sp>
+        <p:nvSpPr>
+          <p:cNvPr id="23" name="gap-5"/>
+          <p:cNvSpPr/>
+          <p:nvPr/>
+        </p:nvSpPr>
+        <p:spPr>
+          <a:xfrm>
+            <a:off x="6126480" y="4389120"/>
+            <a:ext cx="5440680" cy="1325880"/>
+          </a:xfrm>
+          <a:prstGeom prst="roundRect">
+            <a:avLst>
+              <a:gd name="adj" fmla="val 5517"/>
+            </a:avLst>
+          </a:prstGeom>
+          <a:solidFill>
+            <a:schemeClr val="bg2"/>
+          </a:solidFill>
+          <a:ln w="9525">
+            <a:solidFill>
+              <a:schemeClr val="bg2"/>
+            </a:solidFill>
+            <a:prstDash val="solid"/>
+          </a:ln>
+        </p:spPr>
+      </p:sp>
+      <p:sp>
+        <p:nvSpPr>
+          <p:cNvPr id="24" name="gdot-5"/>
+          <p:cNvSpPr/>
+          <p:nvPr/>
+        </p:nvSpPr>
+        <p:spPr>
+          <a:xfrm>
+            <a:off x="6355080" y="4663440"/>
+            <a:ext cx="292608" cy="292608"/>
+          </a:xfrm>
+          <a:prstGeom prst="ellipse">
+            <a:avLst/>
+          </a:prstGeom>
+          <a:solidFill>
+            <a:schemeClr val="accent5"/>
+          </a:solidFill>
+          <a:ln w="12700">
+            <a:solidFill>
+              <a:schemeClr val="accent5"/>
+            </a:solidFill>
+            <a:prstDash val="solid"/>
+          </a:ln>
+        </p:spPr>
+      </p:sp>
+      <p:sp>
+        <p:nvSpPr>
+          <p:cNvPr id="25" name="Text 23"/>
+          <p:cNvSpPr txBox="1"/>
+          <p:nvPr/>
+        </p:nvSpPr>
+        <p:spPr>
+          <a:xfrm>
+            <a:off x="6766560" y="4553712"/>
+            <a:ext cx="4663440" cy="457200"/>
+          </a:xfrm>
+          <a:prstGeom prst="rect">
+            <a:avLst/>
+          </a:prstGeom>
+          <a:noFill/>
+          <a:ln/>
+        </p:spPr>
+        <p:txBody>
+          <a:bodyPr wrap="square" lIns="1016" tIns="1016" rIns="1016" bIns="1016" rtlCol="0" anchor="t"/>
+          <a:lstStyle/>
+          <a:p>
+            <a:pPr algn="l" indent="0" marL="0">
+              <a:buNone/>
+            </a:pPr>
+            <a:r>
+              <a:rPr lang="en-US" sz="1700" b="1" dirty="0">
+                <a:solidFill>
+                  <a:schemeClr val="tx1"/>
+                </a:solidFill>
+              </a:rPr>
+              <a:t>Production antivirus</a:t>
+            </a:r>
+            <a:endParaRPr lang="en-US" sz="1700" dirty="0"/>
+          </a:p>
+        </p:txBody>
+      </p:sp>
+      <p:sp>
+        <p:nvSpPr>
+          <p:cNvPr id="26" name="Text 24"/>
+          <p:cNvSpPr txBox="1"/>
+          <p:nvPr/>
+        </p:nvSpPr>
+        <p:spPr>
+          <a:xfrm>
+            <a:off x="6766560" y="5029200"/>
+            <a:ext cx="4663440" cy="640080"/>
+          </a:xfrm>
+          <a:prstGeom prst="rect">
+            <a:avLst/>
+          </a:prstGeom>
+          <a:noFill/>
+          <a:ln/>
+        </p:spPr>
+        <p:txBody>
+          <a:bodyPr wrap="square" lIns="1016" tIns="1016" rIns="1016" bIns="1016" rtlCol="0" anchor="t"/>
+          <a:lstStyle/>
+          <a:p>
+            <a:pPr algn="l" indent="0" marL="0">
+              <a:buNone/>
+            </a:pPr>
+            <a:r>
+              <a:rPr lang="en-US" sz="1300" dirty="0">
+                <a:solidFill>
+                  <a:schemeClr val="tx1"/>
+                </a:solidFill>
+              </a:rPr>
+              <a:t>Scanning of every merchant upload, mandatory before go-live.</a:t>
+            </a:r>
+            <a:endParaRPr lang="en-US" sz="1300" dirty="0"/>
+          </a:p>
+        </p:txBody>
+      </p:sp>
+      <p:sp>
+        <p:nvSpPr>
+          <p:cNvPr id="27" name="Text 25"/>
+          <p:cNvSpPr txBox="1"/>
+          <p:nvPr/>
+        </p:nvSpPr>
+        <p:spPr>
+          <a:xfrm>
+            <a:off x="457200" y="5943600"/>
+            <a:ext cx="11247120" cy="365760"/>
+          </a:xfrm>
+          <a:prstGeom prst="rect">
+            <a:avLst/>
+          </a:prstGeom>
+          <a:noFill/>
+          <a:ln/>
+        </p:spPr>
+        <p:txBody>
+          <a:bodyPr wrap="square" lIns="0" tIns="0" rIns="0" bIns="0" rtlCol="0" anchor="t"/>
+          <a:lstStyle/>
+          <a:p>
+            <a:pPr algn="l" indent="0" marL="0">
+              <a:buNone/>
+            </a:pPr>
+            <a:r>
+              <a:rPr lang="en-US" sz="1300" i="1" dirty="0">
+                <a:solidFill>
+                  <a:schemeClr val="tx2"/>
+                </a:solidFill>
+              </a:rPr>
+              <a:t>These items are specified or identified, not built. No timeline is committed in this draft.</a:t>
+            </a:r>
+            <a:endParaRPr lang="en-US" sz="1300" dirty="0"/>
+          </a:p>
+        </p:txBody>
+      </p:sp>
+      <p:sp>
+        <p:nvSpPr>
+          <p:cNvPr id="25" name="Slide Number Placeholder 0"/>
+          <p:cNvSpPr>
+            <a:spLocks noGrp="1"/>
+          </p:cNvSpPr>
+          <p:nvPr>
+            <p:ph type="sldNum" sz="quarter" idx="4294967295"/>
+          </p:nvPr>
+        </p:nvSpPr>
+        <p:spPr>
+          <a:xfrm>
+            <a:off x="11247120" y="6400800"/>
+            <a:ext cx="457200" cy="274320"/>
+          </a:xfrm>
+          <a:prstGeom prst="rect">
+            <a:avLst/>
+          </a:prstGeom>
+          <a:extLst>
+            <a:ext uri="{C572A759-6A51-4108-AA02-DFA0A04FC94B}">
+              <ma14:wrappingTextBoxFlag xmlns:ma14="http://schemas.microsoft.com/office/mac/drawingml/2011/main" val="0"/>
+            </a:ext>
+          </a:extLst>
+        </p:spPr>
+        <p:txBody>
+          <a:bodyPr/>
+          <a:lstStyle>
+            <a:lvl1pPr>
+              <a:defRPr sz="1000">
+                <a:solidFill>
+                  <a:schemeClr val="tx2"/>
+                </a:solidFill>
+              </a:defRPr>
+            </a:lvl1pPr>
+          </a:lstStyle>
+          <a:p>
+            <a:pPr algn="r"/>
+            <a:fld id="{F7021451-1387-4CA6-816F-3879F97B5CBC}" type="slidenum">
+              <a:rPr b="0" lang="en-US"/>
+              <a:t>10</a:t>
+            </a:fld>
+            <a:endParaRPr lang="en-US"/>
+          </a:p>
+        </p:txBody>
+      </p:sp>
+    </p:spTree>
+  </p:cSld>
+  <p:clrMapOvr>
+    <a:masterClrMapping/>
+  </p:clrMapOvr>
+</p:sld>
+</file>
+
 <file path=ppt/slides/slide2.xml><?xml version="1.0" encoding="utf-8"?>
 <p:sld xmlns:a="http://schemas.openxmlformats.org/drawingml/2006/main" xmlns:r="http://schemas.openxmlformats.org/officeDocument/2006/relationships" xmlns:p="http://schemas.openxmlformats.org/presentationml/2006/main">
   <p:cSld name="Slide 2">
@@ -2103,7 +3081,7 @@
         <p:spPr>
           <a:xfrm>
             <a:off x="457200" y="1325880"/>
-            <a:ext cx="3566160" cy="1463040"/>
+            <a:ext cx="2606040" cy="1463040"/>
           </a:xfrm>
           <a:prstGeom prst="roundRect">
             <a:avLst>
@@ -2130,7 +3108,7 @@
         <p:spPr>
           <a:xfrm>
             <a:off x="640080" y="1371600"/>
-            <a:ext cx="3200400" cy="822960"/>
+            <a:ext cx="2286000" cy="822960"/>
           </a:xfrm>
           <a:prstGeom prst="rect">
             <a:avLst/>
@@ -2169,7 +3147,7 @@
         <p:spPr>
           <a:xfrm>
             <a:off x="640080" y="2194560"/>
-            <a:ext cx="3200400" cy="548640"/>
+            <a:ext cx="2286000" cy="548640"/>
           </a:xfrm>
           <a:prstGeom prst="rect">
             <a:avLst/>
@@ -2204,8 +3182,8 @@
         </p:nvSpPr>
         <p:spPr>
           <a:xfrm>
-            <a:off x="4251960" y="1325880"/>
-            <a:ext cx="3566160" cy="1463040"/>
+            <a:off x="3291840" y="1325880"/>
+            <a:ext cx="2606040" cy="1463040"/>
           </a:xfrm>
           <a:prstGeom prst="roundRect">
             <a:avLst>
@@ -2231,8 +3209,8 @@
         </p:nvSpPr>
         <p:spPr>
           <a:xfrm>
-            <a:off x="4434840" y="1371600"/>
-            <a:ext cx="3200400" cy="822960"/>
+            <a:off x="3474720" y="1371600"/>
+            <a:ext cx="2286000" cy="822960"/>
           </a:xfrm>
           <a:prstGeom prst="rect">
             <a:avLst/>
@@ -2270,8 +3248,8 @@
         </p:nvSpPr>
         <p:spPr>
           <a:xfrm>
-            <a:off x="4434840" y="2194560"/>
-            <a:ext cx="3200400" cy="548640"/>
+            <a:off x="3474720" y="2194560"/>
+            <a:ext cx="2286000" cy="548640"/>
           </a:xfrm>
           <a:prstGeom prst="rect">
             <a:avLst/>
@@ -2306,8 +3284,8 @@
         </p:nvSpPr>
         <p:spPr>
           <a:xfrm>
-            <a:off x="8046720" y="1325880"/>
-            <a:ext cx="3566160" cy="1463040"/>
+            <a:off x="6126480" y="1325880"/>
+            <a:ext cx="2606040" cy="1463040"/>
           </a:xfrm>
           <a:prstGeom prst="roundRect">
             <a:avLst>
@@ -2333,8 +3311,8 @@
         </p:nvSpPr>
         <p:spPr>
           <a:xfrm>
-            <a:off x="8229600" y="1371600"/>
-            <a:ext cx="3200400" cy="822960"/>
+            <a:off x="6309360" y="1371600"/>
+            <a:ext cx="2286000" cy="822960"/>
           </a:xfrm>
           <a:prstGeom prst="rect">
             <a:avLst/>
@@ -2372,8 +3350,8 @@
         </p:nvSpPr>
         <p:spPr>
           <a:xfrm>
-            <a:off x="8229600" y="2194560"/>
-            <a:ext cx="3200400" cy="548640"/>
+            <a:off x="6309360" y="2194560"/>
+            <a:ext cx="2286000" cy="548640"/>
           </a:xfrm>
           <a:prstGeom prst="rect">
             <a:avLst/>
@@ -2402,37 +3380,139 @@
       </p:sp>
       <p:sp>
         <p:nvSpPr>
-          <p:cNvPr id="12" name="Text 10"/>
+          <p:cNvPr id="12" name="stat-3"/>
+          <p:cNvSpPr/>
+          <p:nvPr/>
+        </p:nvSpPr>
+        <p:spPr>
+          <a:xfrm>
+            <a:off x="8961120" y="1325880"/>
+            <a:ext cx="2606040" cy="1463040"/>
+          </a:xfrm>
+          <a:prstGeom prst="roundRect">
+            <a:avLst>
+              <a:gd name="adj" fmla="val 5000"/>
+            </a:avLst>
+          </a:prstGeom>
+          <a:solidFill>
+            <a:schemeClr val="bg2"/>
+          </a:solidFill>
+          <a:ln w="9525">
+            <a:solidFill>
+              <a:schemeClr val="bg2"/>
+            </a:solidFill>
+            <a:prstDash val="solid"/>
+          </a:ln>
+        </p:spPr>
+      </p:sp>
+      <p:sp>
+        <p:nvSpPr>
+          <p:cNvPr id="13" name="Text 11"/>
           <p:cNvSpPr txBox="1"/>
           <p:nvPr/>
         </p:nvSpPr>
         <p:spPr>
           <a:xfrm>
-            <a:off x="457200" y="3108960"/>
-            <a:ext cx="5486400" cy="411480"/>
-          </a:xfrm>
-          <a:prstGeom prst="rect">
-            <a:avLst/>
-          </a:prstGeom>
-          <a:noFill/>
-          <a:ln/>
-        </p:spPr>
-        <p:txBody>
-          <a:bodyPr wrap="square" lIns="0" tIns="0" rIns="0" bIns="0" rtlCol="0" anchor="t"/>
+            <a:off x="9144000" y="1371600"/>
+            <a:ext cx="2286000" cy="822960"/>
+          </a:xfrm>
+          <a:prstGeom prst="rect">
+            <a:avLst/>
+          </a:prstGeom>
+          <a:noFill/>
+          <a:ln/>
+        </p:spPr>
+        <p:txBody>
+          <a:bodyPr wrap="square" lIns="1016" tIns="1016" rIns="1016" bIns="1016" rtlCol="0" anchor="t"/>
           <a:lstStyle/>
           <a:p>
             <a:pPr algn="l" indent="0" marL="0">
               <a:buNone/>
             </a:pPr>
             <a:r>
-              <a:rPr lang="en-US" sz="2000" b="1" dirty="0">
-                <a:solidFill>
-                  <a:schemeClr val="accent4"/>
+              <a:rPr lang="en-US" sz="5000" b="1" dirty="0">
+                <a:solidFill>
+                  <a:schemeClr val="accent1"/>
                 </a:solidFill>
                 <a:latin typeface="Cambria" pitchFamily="34" charset="0"/>
                 <a:ea typeface="Cambria" pitchFamily="34" charset="-122"/>
                 <a:cs typeface="Cambria" pitchFamily="34" charset="-120"/>
               </a:rPr>
+              <a:t>478</a:t>
+            </a:r>
+            <a:endParaRPr lang="en-US" sz="5000" dirty="0"/>
+          </a:p>
+        </p:txBody>
+      </p:sp>
+      <p:sp>
+        <p:nvSpPr>
+          <p:cNvPr id="14" name="Text 12"/>
+          <p:cNvSpPr txBox="1"/>
+          <p:nvPr/>
+        </p:nvSpPr>
+        <p:spPr>
+          <a:xfrm>
+            <a:off x="9144000" y="2194560"/>
+            <a:ext cx="2286000" cy="548640"/>
+          </a:xfrm>
+          <a:prstGeom prst="rect">
+            <a:avLst/>
+          </a:prstGeom>
+          <a:noFill/>
+          <a:ln/>
+        </p:spPr>
+        <p:txBody>
+          <a:bodyPr wrap="square" lIns="1016" tIns="1016" rIns="1016" bIns="1016" rtlCol="0" anchor="t"/>
+          <a:lstStyle/>
+          <a:p>
+            <a:pPr algn="l" indent="0" marL="0">
+              <a:buNone/>
+            </a:pPr>
+            <a:r>
+              <a:rPr lang="en-US" sz="1400" dirty="0">
+                <a:solidFill>
+                  <a:schemeClr val="tx2"/>
+                </a:solidFill>
+              </a:rPr>
+              <a:t>automated checks, fictitious data</a:t>
+            </a:r>
+            <a:endParaRPr lang="en-US" sz="1400" dirty="0"/>
+          </a:p>
+        </p:txBody>
+      </p:sp>
+      <p:sp>
+        <p:nvSpPr>
+          <p:cNvPr id="15" name="Text 13"/>
+          <p:cNvSpPr txBox="1"/>
+          <p:nvPr/>
+        </p:nvSpPr>
+        <p:spPr>
+          <a:xfrm>
+            <a:off x="457200" y="3108960"/>
+            <a:ext cx="5486400" cy="411480"/>
+          </a:xfrm>
+          <a:prstGeom prst="rect">
+            <a:avLst/>
+          </a:prstGeom>
+          <a:noFill/>
+          <a:ln/>
+        </p:spPr>
+        <p:txBody>
+          <a:bodyPr wrap="square" lIns="0" tIns="0" rIns="0" bIns="0" rtlCol="0" anchor="t"/>
+          <a:lstStyle/>
+          <a:p>
+            <a:pPr algn="l" indent="0" marL="0">
+              <a:buNone/>
+            </a:pPr>
+            <a:r>
+              <a:rPr lang="en-US" sz="2000" b="1" dirty="0">
+                <a:solidFill>
+                  <a:schemeClr val="accent4"/>
+                </a:solidFill>
+                <a:latin typeface="Cambria" pitchFamily="34" charset="0"/>
+                <a:ea typeface="Cambria" pitchFamily="34" charset="-122"/>
+                <a:cs typeface="Cambria" pitchFamily="34" charset="-120"/>
+              </a:rPr>
               <a:t>It shows</a:t>
             </a:r>
             <a:endParaRPr lang="en-US" sz="2000" dirty="0"/>
@@ -2441,7 +3521,7 @@
       </p:sp>
       <p:sp>
         <p:nvSpPr>
-          <p:cNvPr id="13" name="Text 11"/>
+          <p:cNvPr id="16" name="Text 14"/>
           <p:cNvSpPr txBox="1"/>
           <p:nvPr/>
         </p:nvSpPr>
@@ -2535,7 +3615,7 @@
       </p:sp>
       <p:sp>
         <p:nvSpPr>
-          <p:cNvPr id="14" name="Text 12"/>
+          <p:cNvPr id="17" name="Text 15"/>
           <p:cNvSpPr txBox="1"/>
           <p:nvPr/>
         </p:nvSpPr>
@@ -2574,7 +3654,7 @@
       </p:sp>
       <p:sp>
         <p:nvSpPr>
-          <p:cNvPr id="15" name="Text 13"/>
+          <p:cNvPr id="18" name="Text 16"/>
           <p:cNvSpPr txBox="1"/>
           <p:nvPr/>
         </p:nvSpPr>
@@ -6683,7 +7763,7 @@
                   <a:schemeClr val="tx1"/>
                 </a:solidFill>
               </a:rPr>
-              <a:t>Two-factor authentication mandatory for finance, admin and every merchant account.</a:t>
+              <a:t>Two-factor authentication mandatory for finance, admin and merchants. Account locked after 5 failed sign-ins; other sessions end on a password change.</a:t>
             </a:r>
             <a:endParaRPr lang="en-US" sz="1300" dirty="0"/>
           </a:p>
@@ -11799,787 +12879,1353 @@
                   <a:schemeClr val="tx1"/>
                 </a:solidFill>
               </a:rPr>
-              <a:t>Not yet in place</a:t>
+              <a:t>How the controls are tested</a:t>
             </a:r>
             <a:endParaRPr lang="en-US" sz="3000" dirty="0"/>
           </a:p>
         </p:txBody>
       </p:sp>
-      <p:sp>
-        <p:nvSpPr>
-          <p:cNvPr id="3" name="gap-0"/>
-          <p:cNvSpPr/>
-          <p:nvPr/>
-        </p:nvSpPr>
-        <p:spPr>
-          <a:xfrm>
-            <a:off x="457200" y="1280160"/>
-            <a:ext cx="5440680" cy="1325880"/>
-          </a:xfrm>
-          <a:prstGeom prst="roundRect">
-            <a:avLst>
-              <a:gd name="adj" fmla="val 5517"/>
-            </a:avLst>
-          </a:prstGeom>
-          <a:solidFill>
-            <a:schemeClr val="bg2"/>
-          </a:solidFill>
-          <a:ln w="9525">
-            <a:solidFill>
-              <a:schemeClr val="bg2"/>
-            </a:solidFill>
-            <a:prstDash val="solid"/>
-          </a:ln>
-        </p:spPr>
-      </p:sp>
-      <p:sp>
-        <p:nvSpPr>
-          <p:cNvPr id="4" name="gdot-0"/>
-          <p:cNvSpPr/>
-          <p:nvPr/>
-        </p:nvSpPr>
-        <p:spPr>
-          <a:xfrm>
-            <a:off x="685800" y="1554480"/>
-            <a:ext cx="292608" cy="292608"/>
-          </a:xfrm>
-          <a:prstGeom prst="ellipse">
-            <a:avLst/>
-          </a:prstGeom>
-          <a:solidFill>
-            <a:schemeClr val="accent5"/>
-          </a:solidFill>
-          <a:ln w="12700">
-            <a:solidFill>
-              <a:schemeClr val="accent5"/>
-            </a:solidFill>
-            <a:prstDash val="solid"/>
-          </a:ln>
-        </p:spPr>
-      </p:sp>
-      <p:sp>
-        <p:nvSpPr>
-          <p:cNvPr id="5" name="Text 3"/>
+      <p:graphicFrame>
+        <p:nvGraphicFramePr>
+          <p:cNvPr id="10" name="tests-table"/>
+          <p:cNvGraphicFramePr>
+            <a:graphicFrameLocks noGrp="1"/>
+          </p:cNvGraphicFramePr>
+          <p:nvPr>
+            <p:extLst>
+              <p:ext uri="{D42A27DB-BD31-4B8C-83A1-F6EECF244321}">
+                <p14:modId xmlns:p14="http://schemas.microsoft.com/office/powerpoint/2010/main" val="1579011935"/>
+              </p:ext>
+            </p:extLst>
+          </p:nvPr>
+        </p:nvGraphicFramePr>
+        <p:xfrm>
+          <a:off x="457200" y="1234440"/>
+          <a:ext cx="6675120" cy="914400"/>
+        </p:xfrm>
+        <a:graphic>
+          <a:graphicData uri="http://schemas.openxmlformats.org/drawingml/2006/table">
+            <a:tbl>
+              <a:tblPr/>
+              <a:tblGrid>
+                <a:gridCol w="5669280"/>
+                <a:gridCol w="1005840"/>
+              </a:tblGrid>
+              <a:tr h="411480">
+                <a:tc>
+                  <a:txBody>
+                    <a:bodyPr/>
+                    <a:lstStyle/>
+                    <a:p>
+                      <a:pPr indent="0" marL="0">
+                        <a:buNone/>
+                      </a:pPr>
+                      <a:r>
+                        <a:rPr lang="en-US" sz="1200" b="1" dirty="0">
+                          <a:solidFill>
+                            <a:schemeClr val="tx2"/>
+                          </a:solidFill>
+                        </a:rPr>
+                        <a:t>Area tested</a:t>
+                      </a:r>
+                      <a:endParaRPr lang="en-US" sz="1200" dirty="0"/>
+                    </a:p>
+                  </a:txBody>
+                  <a:tcPr marL="54864" marR="54864" marT="54864" marB="54864" anchor="ctr">
+                    <a:lnL w="6350" cap="flat" cmpd="sng" algn="ctr">
+                      <a:solidFill>
+                        <a:srgbClr val="D5DDE7"/>
+                      </a:solidFill>
+                      <a:prstDash val="solid"/>
+                      <a:round/>
+                      <a:headEnd type="none" w="med" len="med"/>
+                      <a:tailEnd type="none" w="med" len="med"/>
+                    </a:lnL>
+                    <a:lnR w="6350" cap="flat" cmpd="sng" algn="ctr">
+                      <a:solidFill>
+                        <a:srgbClr val="D5DDE7"/>
+                      </a:solidFill>
+                      <a:prstDash val="solid"/>
+                      <a:round/>
+                      <a:headEnd type="none" w="med" len="med"/>
+                      <a:tailEnd type="none" w="med" len="med"/>
+                    </a:lnR>
+                    <a:lnT w="6350" cap="flat" cmpd="sng" algn="ctr">
+                      <a:solidFill>
+                        <a:srgbClr val="D5DDE7"/>
+                      </a:solidFill>
+                      <a:prstDash val="solid"/>
+                      <a:round/>
+                      <a:headEnd type="none" w="med" len="med"/>
+                      <a:tailEnd type="none" w="med" len="med"/>
+                    </a:lnT>
+                    <a:lnB w="6350" cap="flat" cmpd="sng" algn="ctr">
+                      <a:solidFill>
+                        <a:srgbClr val="D5DDE7"/>
+                      </a:solidFill>
+                      <a:prstDash val="solid"/>
+                      <a:round/>
+                      <a:headEnd type="none" w="med" len="med"/>
+                      <a:tailEnd type="none" w="med" len="med"/>
+                    </a:lnB>
+                    <a:solidFill>
+                      <a:schemeClr val="bg2"/>
+                    </a:solidFill>
+                  </a:tcPr>
+                </a:tc>
+                <a:tc>
+                  <a:txBody>
+                    <a:bodyPr/>
+                    <a:lstStyle/>
+                    <a:p>
+                      <a:pPr algn="r" indent="0" marL="0">
+                        <a:buNone/>
+                      </a:pPr>
+                      <a:r>
+                        <a:rPr lang="en-US" sz="1200" b="1" dirty="0">
+                          <a:solidFill>
+                            <a:schemeClr val="tx2"/>
+                          </a:solidFill>
+                        </a:rPr>
+                        <a:t>Checks</a:t>
+                      </a:r>
+                      <a:endParaRPr lang="en-US" sz="1200" dirty="0"/>
+                    </a:p>
+                  </a:txBody>
+                  <a:tcPr marL="54864" marR="54864" marT="54864" marB="54864" anchor="ctr">
+                    <a:lnL w="6350" cap="flat" cmpd="sng" algn="ctr">
+                      <a:solidFill>
+                        <a:srgbClr val="D5DDE7"/>
+                      </a:solidFill>
+                      <a:prstDash val="solid"/>
+                      <a:round/>
+                      <a:headEnd type="none" w="med" len="med"/>
+                      <a:tailEnd type="none" w="med" len="med"/>
+                    </a:lnL>
+                    <a:lnR w="6350" cap="flat" cmpd="sng" algn="ctr">
+                      <a:solidFill>
+                        <a:srgbClr val="D5DDE7"/>
+                      </a:solidFill>
+                      <a:prstDash val="solid"/>
+                      <a:round/>
+                      <a:headEnd type="none" w="med" len="med"/>
+                      <a:tailEnd type="none" w="med" len="med"/>
+                    </a:lnR>
+                    <a:lnT w="6350" cap="flat" cmpd="sng" algn="ctr">
+                      <a:solidFill>
+                        <a:srgbClr val="D5DDE7"/>
+                      </a:solidFill>
+                      <a:prstDash val="solid"/>
+                      <a:round/>
+                      <a:headEnd type="none" w="med" len="med"/>
+                      <a:tailEnd type="none" w="med" len="med"/>
+                    </a:lnT>
+                    <a:lnB w="6350" cap="flat" cmpd="sng" algn="ctr">
+                      <a:solidFill>
+                        <a:srgbClr val="D5DDE7"/>
+                      </a:solidFill>
+                      <a:prstDash val="solid"/>
+                      <a:round/>
+                      <a:headEnd type="none" w="med" len="med"/>
+                      <a:tailEnd type="none" w="med" len="med"/>
+                    </a:lnB>
+                    <a:solidFill>
+                      <a:schemeClr val="bg2"/>
+                    </a:solidFill>
+                  </a:tcPr>
+                </a:tc>
+              </a:tr>
+              <a:tr h="411480">
+                <a:tc>
+                  <a:txBody>
+                    <a:bodyPr/>
+                    <a:lstStyle/>
+                    <a:p>
+                      <a:pPr indent="0" marL="0">
+                        <a:buNone/>
+                      </a:pPr>
+                      <a:r>
+                        <a:rPr lang="en-US" sz="1300" dirty="0">
+                          <a:solidFill>
+                            <a:schemeClr val="tx1"/>
+                          </a:solidFill>
+                        </a:rPr>
+                        <a:t>Merchant portal: accounts, 2FA, terms, segregation between merchants</a:t>
+                      </a:r>
+                      <a:endParaRPr lang="en-US" sz="1300" dirty="0"/>
+                    </a:p>
+                  </a:txBody>
+                  <a:tcPr marL="54864" marR="54864" marT="54864" marB="54864" anchor="ctr">
+                    <a:lnL w="6350" cap="flat" cmpd="sng" algn="ctr">
+                      <a:solidFill>
+                        <a:srgbClr val="D5DDE7"/>
+                      </a:solidFill>
+                      <a:prstDash val="solid"/>
+                      <a:round/>
+                      <a:headEnd type="none" w="med" len="med"/>
+                      <a:tailEnd type="none" w="med" len="med"/>
+                    </a:lnL>
+                    <a:lnR w="6350" cap="flat" cmpd="sng" algn="ctr">
+                      <a:solidFill>
+                        <a:srgbClr val="D5DDE7"/>
+                      </a:solidFill>
+                      <a:prstDash val="solid"/>
+                      <a:round/>
+                      <a:headEnd type="none" w="med" len="med"/>
+                      <a:tailEnd type="none" w="med" len="med"/>
+                    </a:lnR>
+                    <a:lnT w="6350" cap="flat" cmpd="sng" algn="ctr">
+                      <a:solidFill>
+                        <a:srgbClr val="D5DDE7"/>
+                      </a:solidFill>
+                      <a:prstDash val="solid"/>
+                      <a:round/>
+                      <a:headEnd type="none" w="med" len="med"/>
+                      <a:tailEnd type="none" w="med" len="med"/>
+                    </a:lnT>
+                    <a:lnB w="6350" cap="flat" cmpd="sng" algn="ctr">
+                      <a:solidFill>
+                        <a:srgbClr val="D5DDE7"/>
+                      </a:solidFill>
+                      <a:prstDash val="solid"/>
+                      <a:round/>
+                      <a:headEnd type="none" w="med" len="med"/>
+                      <a:tailEnd type="none" w="med" len="med"/>
+                    </a:lnB>
+                  </a:tcPr>
+                </a:tc>
+                <a:tc>
+                  <a:txBody>
+                    <a:bodyPr/>
+                    <a:lstStyle/>
+                    <a:p>
+                      <a:pPr algn="r" indent="0" marL="0">
+                        <a:buNone/>
+                      </a:pPr>
+                      <a:r>
+                        <a:rPr lang="en-US" sz="1300" dirty="0">
+                          <a:solidFill>
+                            <a:schemeClr val="tx1"/>
+                          </a:solidFill>
+                        </a:rPr>
+                        <a:t>113</a:t>
+                      </a:r>
+                      <a:endParaRPr lang="en-US" sz="1300" dirty="0"/>
+                    </a:p>
+                  </a:txBody>
+                  <a:tcPr marL="54864" marR="54864" marT="54864" marB="54864" anchor="ctr">
+                    <a:lnL w="6350" cap="flat" cmpd="sng" algn="ctr">
+                      <a:solidFill>
+                        <a:srgbClr val="D5DDE7"/>
+                      </a:solidFill>
+                      <a:prstDash val="solid"/>
+                      <a:round/>
+                      <a:headEnd type="none" w="med" len="med"/>
+                      <a:tailEnd type="none" w="med" len="med"/>
+                    </a:lnL>
+                    <a:lnR w="6350" cap="flat" cmpd="sng" algn="ctr">
+                      <a:solidFill>
+                        <a:srgbClr val="D5DDE7"/>
+                      </a:solidFill>
+                      <a:prstDash val="solid"/>
+                      <a:round/>
+                      <a:headEnd type="none" w="med" len="med"/>
+                      <a:tailEnd type="none" w="med" len="med"/>
+                    </a:lnR>
+                    <a:lnT w="6350" cap="flat" cmpd="sng" algn="ctr">
+                      <a:solidFill>
+                        <a:srgbClr val="D5DDE7"/>
+                      </a:solidFill>
+                      <a:prstDash val="solid"/>
+                      <a:round/>
+                      <a:headEnd type="none" w="med" len="med"/>
+                      <a:tailEnd type="none" w="med" len="med"/>
+                    </a:lnT>
+                    <a:lnB w="6350" cap="flat" cmpd="sng" algn="ctr">
+                      <a:solidFill>
+                        <a:srgbClr val="D5DDE7"/>
+                      </a:solidFill>
+                      <a:prstDash val="solid"/>
+                      <a:round/>
+                      <a:headEnd type="none" w="med" len="med"/>
+                      <a:tailEnd type="none" w="med" len="med"/>
+                    </a:lnB>
+                  </a:tcPr>
+                </a:tc>
+              </a:tr>
+              <a:tr h="411480">
+                <a:tc>
+                  <a:txBody>
+                    <a:bodyPr/>
+                    <a:lstStyle/>
+                    <a:p>
+                      <a:pPr indent="0" marL="0">
+                        <a:buNone/>
+                      </a:pPr>
+                      <a:r>
+                        <a:rPr lang="en-US" sz="1300" dirty="0">
+                          <a:solidFill>
+                            <a:schemeClr val="tx1"/>
+                          </a:solidFill>
+                        </a:rPr>
+                        <a:t>Staff document review and four-eyes</a:t>
+                      </a:r>
+                      <a:endParaRPr lang="en-US" sz="1300" dirty="0"/>
+                    </a:p>
+                  </a:txBody>
+                  <a:tcPr marL="54864" marR="54864" marT="54864" marB="54864" anchor="ctr">
+                    <a:lnL w="6350" cap="flat" cmpd="sng" algn="ctr">
+                      <a:solidFill>
+                        <a:srgbClr val="D5DDE7"/>
+                      </a:solidFill>
+                      <a:prstDash val="solid"/>
+                      <a:round/>
+                      <a:headEnd type="none" w="med" len="med"/>
+                      <a:tailEnd type="none" w="med" len="med"/>
+                    </a:lnL>
+                    <a:lnR w="6350" cap="flat" cmpd="sng" algn="ctr">
+                      <a:solidFill>
+                        <a:srgbClr val="D5DDE7"/>
+                      </a:solidFill>
+                      <a:prstDash val="solid"/>
+                      <a:round/>
+                      <a:headEnd type="none" w="med" len="med"/>
+                      <a:tailEnd type="none" w="med" len="med"/>
+                    </a:lnR>
+                    <a:lnT w="6350" cap="flat" cmpd="sng" algn="ctr">
+                      <a:solidFill>
+                        <a:srgbClr val="D5DDE7"/>
+                      </a:solidFill>
+                      <a:prstDash val="solid"/>
+                      <a:round/>
+                      <a:headEnd type="none" w="med" len="med"/>
+                      <a:tailEnd type="none" w="med" len="med"/>
+                    </a:lnT>
+                    <a:lnB w="6350" cap="flat" cmpd="sng" algn="ctr">
+                      <a:solidFill>
+                        <a:srgbClr val="D5DDE7"/>
+                      </a:solidFill>
+                      <a:prstDash val="solid"/>
+                      <a:round/>
+                      <a:headEnd type="none" w="med" len="med"/>
+                      <a:tailEnd type="none" w="med" len="med"/>
+                    </a:lnB>
+                  </a:tcPr>
+                </a:tc>
+                <a:tc>
+                  <a:txBody>
+                    <a:bodyPr/>
+                    <a:lstStyle/>
+                    <a:p>
+                      <a:pPr algn="r" indent="0" marL="0">
+                        <a:buNone/>
+                      </a:pPr>
+                      <a:r>
+                        <a:rPr lang="en-US" sz="1300" dirty="0">
+                          <a:solidFill>
+                            <a:schemeClr val="tx1"/>
+                          </a:solidFill>
+                        </a:rPr>
+                        <a:t>11</a:t>
+                      </a:r>
+                      <a:endParaRPr lang="en-US" sz="1300" dirty="0"/>
+                    </a:p>
+                  </a:txBody>
+                  <a:tcPr marL="54864" marR="54864" marT="54864" marB="54864" anchor="ctr">
+                    <a:lnL w="6350" cap="flat" cmpd="sng" algn="ctr">
+                      <a:solidFill>
+                        <a:srgbClr val="D5DDE7"/>
+                      </a:solidFill>
+                      <a:prstDash val="solid"/>
+                      <a:round/>
+                      <a:headEnd type="none" w="med" len="med"/>
+                      <a:tailEnd type="none" w="med" len="med"/>
+                    </a:lnL>
+                    <a:lnR w="6350" cap="flat" cmpd="sng" algn="ctr">
+                      <a:solidFill>
+                        <a:srgbClr val="D5DDE7"/>
+                      </a:solidFill>
+                      <a:prstDash val="solid"/>
+                      <a:round/>
+                      <a:headEnd type="none" w="med" len="med"/>
+                      <a:tailEnd type="none" w="med" len="med"/>
+                    </a:lnR>
+                    <a:lnT w="6350" cap="flat" cmpd="sng" algn="ctr">
+                      <a:solidFill>
+                        <a:srgbClr val="D5DDE7"/>
+                      </a:solidFill>
+                      <a:prstDash val="solid"/>
+                      <a:round/>
+                      <a:headEnd type="none" w="med" len="med"/>
+                      <a:tailEnd type="none" w="med" len="med"/>
+                    </a:lnT>
+                    <a:lnB w="6350" cap="flat" cmpd="sng" algn="ctr">
+                      <a:solidFill>
+                        <a:srgbClr val="D5DDE7"/>
+                      </a:solidFill>
+                      <a:prstDash val="solid"/>
+                      <a:round/>
+                      <a:headEnd type="none" w="med" len="med"/>
+                      <a:tailEnd type="none" w="med" len="med"/>
+                    </a:lnB>
+                  </a:tcPr>
+                </a:tc>
+              </a:tr>
+              <a:tr h="411480">
+                <a:tc>
+                  <a:txBody>
+                    <a:bodyPr/>
+                    <a:lstStyle/>
+                    <a:p>
+                      <a:pPr indent="0" marL="0">
+                        <a:buNone/>
+                      </a:pPr>
+                      <a:r>
+                        <a:rPr lang="en-US" sz="1300" dirty="0">
+                          <a:solidFill>
+                            <a:schemeClr val="tx1"/>
+                          </a:solidFill>
+                        </a:rPr>
+                        <a:t>Monthly reporting: cleaning rules, report lines, exports</a:t>
+                      </a:r>
+                      <a:endParaRPr lang="en-US" sz="1300" dirty="0"/>
+                    </a:p>
+                  </a:txBody>
+                  <a:tcPr marL="54864" marR="54864" marT="54864" marB="54864" anchor="ctr">
+                    <a:lnL w="6350" cap="flat" cmpd="sng" algn="ctr">
+                      <a:solidFill>
+                        <a:srgbClr val="D5DDE7"/>
+                      </a:solidFill>
+                      <a:prstDash val="solid"/>
+                      <a:round/>
+                      <a:headEnd type="none" w="med" len="med"/>
+                      <a:tailEnd type="none" w="med" len="med"/>
+                    </a:lnL>
+                    <a:lnR w="6350" cap="flat" cmpd="sng" algn="ctr">
+                      <a:solidFill>
+                        <a:srgbClr val="D5DDE7"/>
+                      </a:solidFill>
+                      <a:prstDash val="solid"/>
+                      <a:round/>
+                      <a:headEnd type="none" w="med" len="med"/>
+                      <a:tailEnd type="none" w="med" len="med"/>
+                    </a:lnR>
+                    <a:lnT w="6350" cap="flat" cmpd="sng" algn="ctr">
+                      <a:solidFill>
+                        <a:srgbClr val="D5DDE7"/>
+                      </a:solidFill>
+                      <a:prstDash val="solid"/>
+                      <a:round/>
+                      <a:headEnd type="none" w="med" len="med"/>
+                      <a:tailEnd type="none" w="med" len="med"/>
+                    </a:lnT>
+                    <a:lnB w="6350" cap="flat" cmpd="sng" algn="ctr">
+                      <a:solidFill>
+                        <a:srgbClr val="D5DDE7"/>
+                      </a:solidFill>
+                      <a:prstDash val="solid"/>
+                      <a:round/>
+                      <a:headEnd type="none" w="med" len="med"/>
+                      <a:tailEnd type="none" w="med" len="med"/>
+                    </a:lnB>
+                  </a:tcPr>
+                </a:tc>
+                <a:tc>
+                  <a:txBody>
+                    <a:bodyPr/>
+                    <a:lstStyle/>
+                    <a:p>
+                      <a:pPr algn="r" indent="0" marL="0">
+                        <a:buNone/>
+                      </a:pPr>
+                      <a:r>
+                        <a:rPr lang="en-US" sz="1300" dirty="0">
+                          <a:solidFill>
+                            <a:schemeClr val="tx1"/>
+                          </a:solidFill>
+                        </a:rPr>
+                        <a:t>65</a:t>
+                      </a:r>
+                      <a:endParaRPr lang="en-US" sz="1300" dirty="0"/>
+                    </a:p>
+                  </a:txBody>
+                  <a:tcPr marL="54864" marR="54864" marT="54864" marB="54864" anchor="ctr">
+                    <a:lnL w="6350" cap="flat" cmpd="sng" algn="ctr">
+                      <a:solidFill>
+                        <a:srgbClr val="D5DDE7"/>
+                      </a:solidFill>
+                      <a:prstDash val="solid"/>
+                      <a:round/>
+                      <a:headEnd type="none" w="med" len="med"/>
+                      <a:tailEnd type="none" w="med" len="med"/>
+                    </a:lnL>
+                    <a:lnR w="6350" cap="flat" cmpd="sng" algn="ctr">
+                      <a:solidFill>
+                        <a:srgbClr val="D5DDE7"/>
+                      </a:solidFill>
+                      <a:prstDash val="solid"/>
+                      <a:round/>
+                      <a:headEnd type="none" w="med" len="med"/>
+                      <a:tailEnd type="none" w="med" len="med"/>
+                    </a:lnR>
+                    <a:lnT w="6350" cap="flat" cmpd="sng" algn="ctr">
+                      <a:solidFill>
+                        <a:srgbClr val="D5DDE7"/>
+                      </a:solidFill>
+                      <a:prstDash val="solid"/>
+                      <a:round/>
+                      <a:headEnd type="none" w="med" len="med"/>
+                      <a:tailEnd type="none" w="med" len="med"/>
+                    </a:lnT>
+                    <a:lnB w="6350" cap="flat" cmpd="sng" algn="ctr">
+                      <a:solidFill>
+                        <a:srgbClr val="D5DDE7"/>
+                      </a:solidFill>
+                      <a:prstDash val="solid"/>
+                      <a:round/>
+                      <a:headEnd type="none" w="med" len="med"/>
+                      <a:tailEnd type="none" w="med" len="med"/>
+                    </a:lnB>
+                  </a:tcPr>
+                </a:tc>
+              </a:tr>
+              <a:tr h="411480">
+                <a:tc>
+                  <a:txBody>
+                    <a:bodyPr/>
+                    <a:lstStyle/>
+                    <a:p>
+                      <a:pPr indent="0" marL="0">
+                        <a:buNone/>
+                      </a:pPr>
+                      <a:r>
+                        <a:rPr lang="en-US" sz="1300" dirty="0">
+                          <a:solidFill>
+                            <a:schemeClr val="tx1"/>
+                          </a:solidFill>
+                        </a:rPr>
+                        <a:t>Billing: fee rules, VAT, invoice lifecycle</a:t>
+                      </a:r>
+                      <a:endParaRPr lang="en-US" sz="1300" dirty="0"/>
+                    </a:p>
+                  </a:txBody>
+                  <a:tcPr marL="54864" marR="54864" marT="54864" marB="54864" anchor="ctr">
+                    <a:lnL w="6350" cap="flat" cmpd="sng" algn="ctr">
+                      <a:solidFill>
+                        <a:srgbClr val="D5DDE7"/>
+                      </a:solidFill>
+                      <a:prstDash val="solid"/>
+                      <a:round/>
+                      <a:headEnd type="none" w="med" len="med"/>
+                      <a:tailEnd type="none" w="med" len="med"/>
+                    </a:lnL>
+                    <a:lnR w="6350" cap="flat" cmpd="sng" algn="ctr">
+                      <a:solidFill>
+                        <a:srgbClr val="D5DDE7"/>
+                      </a:solidFill>
+                      <a:prstDash val="solid"/>
+                      <a:round/>
+                      <a:headEnd type="none" w="med" len="med"/>
+                      <a:tailEnd type="none" w="med" len="med"/>
+                    </a:lnR>
+                    <a:lnT w="6350" cap="flat" cmpd="sng" algn="ctr">
+                      <a:solidFill>
+                        <a:srgbClr val="D5DDE7"/>
+                      </a:solidFill>
+                      <a:prstDash val="solid"/>
+                      <a:round/>
+                      <a:headEnd type="none" w="med" len="med"/>
+                      <a:tailEnd type="none" w="med" len="med"/>
+                    </a:lnT>
+                    <a:lnB w="6350" cap="flat" cmpd="sng" algn="ctr">
+                      <a:solidFill>
+                        <a:srgbClr val="D5DDE7"/>
+                      </a:solidFill>
+                      <a:prstDash val="solid"/>
+                      <a:round/>
+                      <a:headEnd type="none" w="med" len="med"/>
+                      <a:tailEnd type="none" w="med" len="med"/>
+                    </a:lnB>
+                  </a:tcPr>
+                </a:tc>
+                <a:tc>
+                  <a:txBody>
+                    <a:bodyPr/>
+                    <a:lstStyle/>
+                    <a:p>
+                      <a:pPr algn="r" indent="0" marL="0">
+                        <a:buNone/>
+                      </a:pPr>
+                      <a:r>
+                        <a:rPr lang="en-US" sz="1300" dirty="0">
+                          <a:solidFill>
+                            <a:schemeClr val="tx1"/>
+                          </a:solidFill>
+                        </a:rPr>
+                        <a:t>47</a:t>
+                      </a:r>
+                      <a:endParaRPr lang="en-US" sz="1300" dirty="0"/>
+                    </a:p>
+                  </a:txBody>
+                  <a:tcPr marL="54864" marR="54864" marT="54864" marB="54864" anchor="ctr">
+                    <a:lnL w="6350" cap="flat" cmpd="sng" algn="ctr">
+                      <a:solidFill>
+                        <a:srgbClr val="D5DDE7"/>
+                      </a:solidFill>
+                      <a:prstDash val="solid"/>
+                      <a:round/>
+                      <a:headEnd type="none" w="med" len="med"/>
+                      <a:tailEnd type="none" w="med" len="med"/>
+                    </a:lnL>
+                    <a:lnR w="6350" cap="flat" cmpd="sng" algn="ctr">
+                      <a:solidFill>
+                        <a:srgbClr val="D5DDE7"/>
+                      </a:solidFill>
+                      <a:prstDash val="solid"/>
+                      <a:round/>
+                      <a:headEnd type="none" w="med" len="med"/>
+                      <a:tailEnd type="none" w="med" len="med"/>
+                    </a:lnR>
+                    <a:lnT w="6350" cap="flat" cmpd="sng" algn="ctr">
+                      <a:solidFill>
+                        <a:srgbClr val="D5DDE7"/>
+                      </a:solidFill>
+                      <a:prstDash val="solid"/>
+                      <a:round/>
+                      <a:headEnd type="none" w="med" len="med"/>
+                      <a:tailEnd type="none" w="med" len="med"/>
+                    </a:lnT>
+                    <a:lnB w="6350" cap="flat" cmpd="sng" algn="ctr">
+                      <a:solidFill>
+                        <a:srgbClr val="D5DDE7"/>
+                      </a:solidFill>
+                      <a:prstDash val="solid"/>
+                      <a:round/>
+                      <a:headEnd type="none" w="med" len="med"/>
+                      <a:tailEnd type="none" w="med" len="med"/>
+                    </a:lnB>
+                  </a:tcPr>
+                </a:tc>
+              </a:tr>
+              <a:tr h="411480">
+                <a:tc>
+                  <a:txBody>
+                    <a:bodyPr/>
+                    <a:lstStyle/>
+                    <a:p>
+                      <a:pPr indent="0" marL="0">
+                        <a:buNone/>
+                      </a:pPr>
+                      <a:r>
+                        <a:rPr lang="en-US" sz="1300" dirty="0">
+                          <a:solidFill>
+                            <a:schemeClr val="tx1"/>
+                          </a:solidFill>
+                        </a:rPr>
+                        <a:t>Acquirer reconciliation: gap categories to the cent</a:t>
+                      </a:r>
+                      <a:endParaRPr lang="en-US" sz="1300" dirty="0"/>
+                    </a:p>
+                  </a:txBody>
+                  <a:tcPr marL="54864" marR="54864" marT="54864" marB="54864" anchor="ctr">
+                    <a:lnL w="6350" cap="flat" cmpd="sng" algn="ctr">
+                      <a:solidFill>
+                        <a:srgbClr val="D5DDE7"/>
+                      </a:solidFill>
+                      <a:prstDash val="solid"/>
+                      <a:round/>
+                      <a:headEnd type="none" w="med" len="med"/>
+                      <a:tailEnd type="none" w="med" len="med"/>
+                    </a:lnL>
+                    <a:lnR w="6350" cap="flat" cmpd="sng" algn="ctr">
+                      <a:solidFill>
+                        <a:srgbClr val="D5DDE7"/>
+                      </a:solidFill>
+                      <a:prstDash val="solid"/>
+                      <a:round/>
+                      <a:headEnd type="none" w="med" len="med"/>
+                      <a:tailEnd type="none" w="med" len="med"/>
+                    </a:lnR>
+                    <a:lnT w="6350" cap="flat" cmpd="sng" algn="ctr">
+                      <a:solidFill>
+                        <a:srgbClr val="D5DDE7"/>
+                      </a:solidFill>
+                      <a:prstDash val="solid"/>
+                      <a:round/>
+                      <a:headEnd type="none" w="med" len="med"/>
+                      <a:tailEnd type="none" w="med" len="med"/>
+                    </a:lnT>
+                    <a:lnB w="6350" cap="flat" cmpd="sng" algn="ctr">
+                      <a:solidFill>
+                        <a:srgbClr val="D5DDE7"/>
+                      </a:solidFill>
+                      <a:prstDash val="solid"/>
+                      <a:round/>
+                      <a:headEnd type="none" w="med" len="med"/>
+                      <a:tailEnd type="none" w="med" len="med"/>
+                    </a:lnB>
+                  </a:tcPr>
+                </a:tc>
+                <a:tc>
+                  <a:txBody>
+                    <a:bodyPr/>
+                    <a:lstStyle/>
+                    <a:p>
+                      <a:pPr algn="r" indent="0" marL="0">
+                        <a:buNone/>
+                      </a:pPr>
+                      <a:r>
+                        <a:rPr lang="en-US" sz="1300" dirty="0">
+                          <a:solidFill>
+                            <a:schemeClr val="tx1"/>
+                          </a:solidFill>
+                        </a:rPr>
+                        <a:t>55</a:t>
+                      </a:r>
+                      <a:endParaRPr lang="en-US" sz="1300" dirty="0"/>
+                    </a:p>
+                  </a:txBody>
+                  <a:tcPr marL="54864" marR="54864" marT="54864" marB="54864" anchor="ctr">
+                    <a:lnL w="6350" cap="flat" cmpd="sng" algn="ctr">
+                      <a:solidFill>
+                        <a:srgbClr val="D5DDE7"/>
+                      </a:solidFill>
+                      <a:prstDash val="solid"/>
+                      <a:round/>
+                      <a:headEnd type="none" w="med" len="med"/>
+                      <a:tailEnd type="none" w="med" len="med"/>
+                    </a:lnL>
+                    <a:lnR w="6350" cap="flat" cmpd="sng" algn="ctr">
+                      <a:solidFill>
+                        <a:srgbClr val="D5DDE7"/>
+                      </a:solidFill>
+                      <a:prstDash val="solid"/>
+                      <a:round/>
+                      <a:headEnd type="none" w="med" len="med"/>
+                      <a:tailEnd type="none" w="med" len="med"/>
+                    </a:lnR>
+                    <a:lnT w="6350" cap="flat" cmpd="sng" algn="ctr">
+                      <a:solidFill>
+                        <a:srgbClr val="D5DDE7"/>
+                      </a:solidFill>
+                      <a:prstDash val="solid"/>
+                      <a:round/>
+                      <a:headEnd type="none" w="med" len="med"/>
+                      <a:tailEnd type="none" w="med" len="med"/>
+                    </a:lnT>
+                    <a:lnB w="6350" cap="flat" cmpd="sng" algn="ctr">
+                      <a:solidFill>
+                        <a:srgbClr val="D5DDE7"/>
+                      </a:solidFill>
+                      <a:prstDash val="solid"/>
+                      <a:round/>
+                      <a:headEnd type="none" w="med" len="med"/>
+                      <a:tailEnd type="none" w="med" len="med"/>
+                    </a:lnB>
+                  </a:tcPr>
+                </a:tc>
+              </a:tr>
+              <a:tr h="411480">
+                <a:tc>
+                  <a:txBody>
+                    <a:bodyPr/>
+                    <a:lstStyle/>
+                    <a:p>
+                      <a:pPr indent="0" marL="0">
+                        <a:buNone/>
+                      </a:pPr>
+                      <a:r>
+                        <a:rPr lang="en-US" sz="1300" dirty="0">
+                          <a:solidFill>
+                            <a:schemeClr val="tx1"/>
+                          </a:solidFill>
+                        </a:rPr>
+                        <a:t>Direct data import (simulated source)</a:t>
+                      </a:r>
+                      <a:endParaRPr lang="en-US" sz="1300" dirty="0"/>
+                    </a:p>
+                  </a:txBody>
+                  <a:tcPr marL="54864" marR="54864" marT="54864" marB="54864" anchor="ctr">
+                    <a:lnL w="6350" cap="flat" cmpd="sng" algn="ctr">
+                      <a:solidFill>
+                        <a:srgbClr val="D5DDE7"/>
+                      </a:solidFill>
+                      <a:prstDash val="solid"/>
+                      <a:round/>
+                      <a:headEnd type="none" w="med" len="med"/>
+                      <a:tailEnd type="none" w="med" len="med"/>
+                    </a:lnL>
+                    <a:lnR w="6350" cap="flat" cmpd="sng" algn="ctr">
+                      <a:solidFill>
+                        <a:srgbClr val="D5DDE7"/>
+                      </a:solidFill>
+                      <a:prstDash val="solid"/>
+                      <a:round/>
+                      <a:headEnd type="none" w="med" len="med"/>
+                      <a:tailEnd type="none" w="med" len="med"/>
+                    </a:lnR>
+                    <a:lnT w="6350" cap="flat" cmpd="sng" algn="ctr">
+                      <a:solidFill>
+                        <a:srgbClr val="D5DDE7"/>
+                      </a:solidFill>
+                      <a:prstDash val="solid"/>
+                      <a:round/>
+                      <a:headEnd type="none" w="med" len="med"/>
+                      <a:tailEnd type="none" w="med" len="med"/>
+                    </a:lnT>
+                    <a:lnB w="6350" cap="flat" cmpd="sng" algn="ctr">
+                      <a:solidFill>
+                        <a:srgbClr val="D5DDE7"/>
+                      </a:solidFill>
+                      <a:prstDash val="solid"/>
+                      <a:round/>
+                      <a:headEnd type="none" w="med" len="med"/>
+                      <a:tailEnd type="none" w="med" len="med"/>
+                    </a:lnB>
+                  </a:tcPr>
+                </a:tc>
+                <a:tc>
+                  <a:txBody>
+                    <a:bodyPr/>
+                    <a:lstStyle/>
+                    <a:p>
+                      <a:pPr algn="r" indent="0" marL="0">
+                        <a:buNone/>
+                      </a:pPr>
+                      <a:r>
+                        <a:rPr lang="en-US" sz="1300" dirty="0">
+                          <a:solidFill>
+                            <a:schemeClr val="tx1"/>
+                          </a:solidFill>
+                        </a:rPr>
+                        <a:t>23</a:t>
+                      </a:r>
+                      <a:endParaRPr lang="en-US" sz="1300" dirty="0"/>
+                    </a:p>
+                  </a:txBody>
+                  <a:tcPr marL="54864" marR="54864" marT="54864" marB="54864" anchor="ctr">
+                    <a:lnL w="6350" cap="flat" cmpd="sng" algn="ctr">
+                      <a:solidFill>
+                        <a:srgbClr val="D5DDE7"/>
+                      </a:solidFill>
+                      <a:prstDash val="solid"/>
+                      <a:round/>
+                      <a:headEnd type="none" w="med" len="med"/>
+                      <a:tailEnd type="none" w="med" len="med"/>
+                    </a:lnL>
+                    <a:lnR w="6350" cap="flat" cmpd="sng" algn="ctr">
+                      <a:solidFill>
+                        <a:srgbClr val="D5DDE7"/>
+                      </a:solidFill>
+                      <a:prstDash val="solid"/>
+                      <a:round/>
+                      <a:headEnd type="none" w="med" len="med"/>
+                      <a:tailEnd type="none" w="med" len="med"/>
+                    </a:lnR>
+                    <a:lnT w="6350" cap="flat" cmpd="sng" algn="ctr">
+                      <a:solidFill>
+                        <a:srgbClr val="D5DDE7"/>
+                      </a:solidFill>
+                      <a:prstDash val="solid"/>
+                      <a:round/>
+                      <a:headEnd type="none" w="med" len="med"/>
+                      <a:tailEnd type="none" w="med" len="med"/>
+                    </a:lnT>
+                    <a:lnB w="6350" cap="flat" cmpd="sng" algn="ctr">
+                      <a:solidFill>
+                        <a:srgbClr val="D5DDE7"/>
+                      </a:solidFill>
+                      <a:prstDash val="solid"/>
+                      <a:round/>
+                      <a:headEnd type="none" w="med" len="med"/>
+                      <a:tailEnd type="none" w="med" len="med"/>
+                    </a:lnB>
+                  </a:tcPr>
+                </a:tc>
+              </a:tr>
+              <a:tr h="411480">
+                <a:tc>
+                  <a:txBody>
+                    <a:bodyPr/>
+                    <a:lstStyle/>
+                    <a:p>
+                      <a:pPr indent="0" marL="0">
+                        <a:buNone/>
+                      </a:pPr>
+                      <a:r>
+                        <a:rPr lang="en-US" sz="1300" dirty="0">
+                          <a:solidFill>
+                            <a:schemeClr val="tx1"/>
+                          </a:solidFill>
+                        </a:rPr>
+                        <a:t>Merchant records: contacts, identifiers, contracts</a:t>
+                      </a:r>
+                      <a:endParaRPr lang="en-US" sz="1300" dirty="0"/>
+                    </a:p>
+                  </a:txBody>
+                  <a:tcPr marL="54864" marR="54864" marT="54864" marB="54864" anchor="ctr">
+                    <a:lnL w="6350" cap="flat" cmpd="sng" algn="ctr">
+                      <a:solidFill>
+                        <a:srgbClr val="D5DDE7"/>
+                      </a:solidFill>
+                      <a:prstDash val="solid"/>
+                      <a:round/>
+                      <a:headEnd type="none" w="med" len="med"/>
+                      <a:tailEnd type="none" w="med" len="med"/>
+                    </a:lnL>
+                    <a:lnR w="6350" cap="flat" cmpd="sng" algn="ctr">
+                      <a:solidFill>
+                        <a:srgbClr val="D5DDE7"/>
+                      </a:solidFill>
+                      <a:prstDash val="solid"/>
+                      <a:round/>
+                      <a:headEnd type="none" w="med" len="med"/>
+                      <a:tailEnd type="none" w="med" len="med"/>
+                    </a:lnR>
+                    <a:lnT w="6350" cap="flat" cmpd="sng" algn="ctr">
+                      <a:solidFill>
+                        <a:srgbClr val="D5DDE7"/>
+                      </a:solidFill>
+                      <a:prstDash val="solid"/>
+                      <a:round/>
+                      <a:headEnd type="none" w="med" len="med"/>
+                      <a:tailEnd type="none" w="med" len="med"/>
+                    </a:lnT>
+                    <a:lnB w="6350" cap="flat" cmpd="sng" algn="ctr">
+                      <a:solidFill>
+                        <a:srgbClr val="D5DDE7"/>
+                      </a:solidFill>
+                      <a:prstDash val="solid"/>
+                      <a:round/>
+                      <a:headEnd type="none" w="med" len="med"/>
+                      <a:tailEnd type="none" w="med" len="med"/>
+                    </a:lnB>
+                  </a:tcPr>
+                </a:tc>
+                <a:tc>
+                  <a:txBody>
+                    <a:bodyPr/>
+                    <a:lstStyle/>
+                    <a:p>
+                      <a:pPr algn="r" indent="0" marL="0">
+                        <a:buNone/>
+                      </a:pPr>
+                      <a:r>
+                        <a:rPr lang="en-US" sz="1300" dirty="0">
+                          <a:solidFill>
+                            <a:schemeClr val="tx1"/>
+                          </a:solidFill>
+                        </a:rPr>
+                        <a:t>71</a:t>
+                      </a:r>
+                      <a:endParaRPr lang="en-US" sz="1300" dirty="0"/>
+                    </a:p>
+                  </a:txBody>
+                  <a:tcPr marL="54864" marR="54864" marT="54864" marB="54864" anchor="ctr">
+                    <a:lnL w="6350" cap="flat" cmpd="sng" algn="ctr">
+                      <a:solidFill>
+                        <a:srgbClr val="D5DDE7"/>
+                      </a:solidFill>
+                      <a:prstDash val="solid"/>
+                      <a:round/>
+                      <a:headEnd type="none" w="med" len="med"/>
+                      <a:tailEnd type="none" w="med" len="med"/>
+                    </a:lnL>
+                    <a:lnR w="6350" cap="flat" cmpd="sng" algn="ctr">
+                      <a:solidFill>
+                        <a:srgbClr val="D5DDE7"/>
+                      </a:solidFill>
+                      <a:prstDash val="solid"/>
+                      <a:round/>
+                      <a:headEnd type="none" w="med" len="med"/>
+                      <a:tailEnd type="none" w="med" len="med"/>
+                    </a:lnR>
+                    <a:lnT w="6350" cap="flat" cmpd="sng" algn="ctr">
+                      <a:solidFill>
+                        <a:srgbClr val="D5DDE7"/>
+                      </a:solidFill>
+                      <a:prstDash val="solid"/>
+                      <a:round/>
+                      <a:headEnd type="none" w="med" len="med"/>
+                      <a:tailEnd type="none" w="med" len="med"/>
+                    </a:lnT>
+                    <a:lnB w="6350" cap="flat" cmpd="sng" algn="ctr">
+                      <a:solidFill>
+                        <a:srgbClr val="D5DDE7"/>
+                      </a:solidFill>
+                      <a:prstDash val="solid"/>
+                      <a:round/>
+                      <a:headEnd type="none" w="med" len="med"/>
+                      <a:tailEnd type="none" w="med" len="med"/>
+                    </a:lnB>
+                  </a:tcPr>
+                </a:tc>
+              </a:tr>
+              <a:tr h="411480">
+                <a:tc>
+                  <a:txBody>
+                    <a:bodyPr/>
+                    <a:lstStyle/>
+                    <a:p>
+                      <a:pPr indent="0" marL="0">
+                        <a:buNone/>
+                      </a:pPr>
+                      <a:r>
+                        <a:rPr lang="en-US" sz="1300" dirty="0">
+                          <a:solidFill>
+                            <a:schemeClr val="tx1"/>
+                          </a:solidFill>
+                        </a:rPr>
+                        <a:t>Staff accounts, roles, 2FA, audit log, sign-in lockout</a:t>
+                      </a:r>
+                      <a:endParaRPr lang="en-US" sz="1300" dirty="0"/>
+                    </a:p>
+                  </a:txBody>
+                  <a:tcPr marL="54864" marR="54864" marT="54864" marB="54864" anchor="ctr">
+                    <a:lnL w="6350" cap="flat" cmpd="sng" algn="ctr">
+                      <a:solidFill>
+                        <a:srgbClr val="D5DDE7"/>
+                      </a:solidFill>
+                      <a:prstDash val="solid"/>
+                      <a:round/>
+                      <a:headEnd type="none" w="med" len="med"/>
+                      <a:tailEnd type="none" w="med" len="med"/>
+                    </a:lnL>
+                    <a:lnR w="6350" cap="flat" cmpd="sng" algn="ctr">
+                      <a:solidFill>
+                        <a:srgbClr val="D5DDE7"/>
+                      </a:solidFill>
+                      <a:prstDash val="solid"/>
+                      <a:round/>
+                      <a:headEnd type="none" w="med" len="med"/>
+                      <a:tailEnd type="none" w="med" len="med"/>
+                    </a:lnR>
+                    <a:lnT w="6350" cap="flat" cmpd="sng" algn="ctr">
+                      <a:solidFill>
+                        <a:srgbClr val="D5DDE7"/>
+                      </a:solidFill>
+                      <a:prstDash val="solid"/>
+                      <a:round/>
+                      <a:headEnd type="none" w="med" len="med"/>
+                      <a:tailEnd type="none" w="med" len="med"/>
+                    </a:lnT>
+                    <a:lnB w="6350" cap="flat" cmpd="sng" algn="ctr">
+                      <a:solidFill>
+                        <a:srgbClr val="D5DDE7"/>
+                      </a:solidFill>
+                      <a:prstDash val="solid"/>
+                      <a:round/>
+                      <a:headEnd type="none" w="med" len="med"/>
+                      <a:tailEnd type="none" w="med" len="med"/>
+                    </a:lnB>
+                  </a:tcPr>
+                </a:tc>
+                <a:tc>
+                  <a:txBody>
+                    <a:bodyPr/>
+                    <a:lstStyle/>
+                    <a:p>
+                      <a:pPr algn="r" indent="0" marL="0">
+                        <a:buNone/>
+                      </a:pPr>
+                      <a:r>
+                        <a:rPr lang="en-US" sz="1300" dirty="0">
+                          <a:solidFill>
+                            <a:schemeClr val="tx1"/>
+                          </a:solidFill>
+                        </a:rPr>
+                        <a:t>93</a:t>
+                      </a:r>
+                      <a:endParaRPr lang="en-US" sz="1300" dirty="0"/>
+                    </a:p>
+                  </a:txBody>
+                  <a:tcPr marL="54864" marR="54864" marT="54864" marB="54864" anchor="ctr">
+                    <a:lnL w="6350" cap="flat" cmpd="sng" algn="ctr">
+                      <a:solidFill>
+                        <a:srgbClr val="D5DDE7"/>
+                      </a:solidFill>
+                      <a:prstDash val="solid"/>
+                      <a:round/>
+                      <a:headEnd type="none" w="med" len="med"/>
+                      <a:tailEnd type="none" w="med" len="med"/>
+                    </a:lnL>
+                    <a:lnR w="6350" cap="flat" cmpd="sng" algn="ctr">
+                      <a:solidFill>
+                        <a:srgbClr val="D5DDE7"/>
+                      </a:solidFill>
+                      <a:prstDash val="solid"/>
+                      <a:round/>
+                      <a:headEnd type="none" w="med" len="med"/>
+                      <a:tailEnd type="none" w="med" len="med"/>
+                    </a:lnR>
+                    <a:lnT w="6350" cap="flat" cmpd="sng" algn="ctr">
+                      <a:solidFill>
+                        <a:srgbClr val="D5DDE7"/>
+                      </a:solidFill>
+                      <a:prstDash val="solid"/>
+                      <a:round/>
+                      <a:headEnd type="none" w="med" len="med"/>
+                      <a:tailEnd type="none" w="med" len="med"/>
+                    </a:lnT>
+                    <a:lnB w="6350" cap="flat" cmpd="sng" algn="ctr">
+                      <a:solidFill>
+                        <a:srgbClr val="D5DDE7"/>
+                      </a:solidFill>
+                      <a:prstDash val="solid"/>
+                      <a:round/>
+                      <a:headEnd type="none" w="med" len="med"/>
+                      <a:tailEnd type="none" w="med" len="med"/>
+                    </a:lnB>
+                  </a:tcPr>
+                </a:tc>
+              </a:tr>
+            </a:tbl>
+          </a:graphicData>
+        </a:graphic>
+      </p:graphicFrame>
+      <p:sp>
+        <p:nvSpPr>
+          <p:cNvPr id="4" name="Text 1"/>
           <p:cNvSpPr txBox="1"/>
           <p:nvPr/>
         </p:nvSpPr>
         <p:spPr>
           <a:xfrm>
-            <a:off x="1097280" y="1444752"/>
-            <a:ext cx="4663440" cy="457200"/>
-          </a:xfrm>
-          <a:prstGeom prst="rect">
-            <a:avLst/>
-          </a:prstGeom>
-          <a:noFill/>
-          <a:ln/>
-        </p:spPr>
-        <p:txBody>
-          <a:bodyPr wrap="square" lIns="1016" tIns="1016" rIns="1016" bIns="1016" rtlCol="0" anchor="t"/>
+            <a:off x="7498080" y="1234440"/>
+            <a:ext cx="4206240" cy="411480"/>
+          </a:xfrm>
+          <a:prstGeom prst="rect">
+            <a:avLst/>
+          </a:prstGeom>
+          <a:noFill/>
+          <a:ln/>
+        </p:spPr>
+        <p:txBody>
+          <a:bodyPr wrap="square" lIns="0" tIns="0" rIns="0" bIns="0" rtlCol="0" anchor="t"/>
           <a:lstStyle/>
           <a:p>
             <a:pPr algn="l" indent="0" marL="0">
               <a:buNone/>
             </a:pPr>
             <a:r>
-              <a:rPr lang="en-US" sz="1700" b="1" dirty="0">
+              <a:rPr lang="en-US" sz="1800" b="1" dirty="0">
+                <a:solidFill>
+                  <a:schemeClr val="accent4"/>
+                </a:solidFill>
+                <a:latin typeface="Cambria" pitchFamily="34" charset="0"/>
+                <a:ea typeface="Cambria" pitchFamily="34" charset="-122"/>
+                <a:cs typeface="Cambria" pitchFamily="34" charset="-120"/>
+              </a:rPr>
+              <a:t>What the tests show</a:t>
+            </a:r>
+            <a:endParaRPr lang="en-US" sz="1800" dirty="0"/>
+          </a:p>
+        </p:txBody>
+      </p:sp>
+      <p:sp>
+        <p:nvSpPr>
+          <p:cNvPr id="5" name="Text 2"/>
+          <p:cNvSpPr txBox="1"/>
+          <p:nvPr/>
+        </p:nvSpPr>
+        <p:spPr>
+          <a:xfrm>
+            <a:off x="7498080" y="1691640"/>
+            <a:ext cx="4206240" cy="2286000"/>
+          </a:xfrm>
+          <a:prstGeom prst="rect">
+            <a:avLst/>
+          </a:prstGeom>
+          <a:noFill/>
+          <a:ln/>
+        </p:spPr>
+        <p:txBody>
+          <a:bodyPr wrap="square" lIns="635" tIns="635" rIns="635" bIns="635" rtlCol="0" anchor="t"/>
+          <a:lstStyle/>
+          <a:p>
+            <a:pPr marL="342900" indent="-342900">
+              <a:spcAft>
+                <a:spcPts val="600"/>
+              </a:spcAft>
+              <a:buSzPct val="100000"/>
+              <a:buChar char="•"/>
+            </a:pPr>
+            <a:r>
+              <a:rPr lang="en-US" sz="1300" dirty="0">
                 <a:solidFill>
                   <a:schemeClr val="tx1"/>
                 </a:solidFill>
               </a:rPr>
-              <a:t>Safeguarding reconciliation</a:t>
-            </a:r>
-            <a:endParaRPr lang="en-US" sz="1700" dirty="0"/>
-          </a:p>
-        </p:txBody>
-      </p:sp>
-      <p:sp>
-        <p:nvSpPr>
-          <p:cNvPr id="6" name="Text 4"/>
+              <a:t>Each control is exercised through the application interface, as a user would</a:t>
+            </a:r>
+            <a:endParaRPr lang="en-US" sz="1300" dirty="0"/>
+          </a:p>
+          <a:p>
+            <a:pPr marL="342900" indent="-342900">
+              <a:spcAft>
+                <a:spcPts val="600"/>
+              </a:spcAft>
+              <a:buSzPct val="100000"/>
+              <a:buChar char="•"/>
+            </a:pPr>
+            <a:r>
+              <a:rPr lang="en-US" sz="1300" dirty="0">
+                <a:solidFill>
+                  <a:schemeClr val="tx1"/>
+                </a:solidFill>
+              </a:rPr>
+              <a:t>Refusals are checked as well as successes: wrong role, other merchant's case, own document, missing approval blockers</a:t>
+            </a:r>
+            <a:endParaRPr lang="en-US" sz="1300" dirty="0"/>
+          </a:p>
+          <a:p>
+            <a:pPr marL="342900" indent="-342900">
+              <a:spcAft>
+                <a:spcPts val="600"/>
+              </a:spcAft>
+              <a:buSzPct val="100000"/>
+              <a:buChar char="•"/>
+            </a:pPr>
+            <a:r>
+              <a:rPr lang="en-US" sz="1300" dirty="0">
+                <a:solidFill>
+                  <a:schemeClr val="tx1"/>
+                </a:solidFill>
+              </a:rPr>
+              <a:t>Expected figures are computed by hand from fictitious data</a:t>
+            </a:r>
+            <a:endParaRPr lang="en-US" sz="1300" dirty="0"/>
+          </a:p>
+        </p:txBody>
+      </p:sp>
+      <p:sp>
+        <p:nvSpPr>
+          <p:cNvPr id="6" name="Text 3"/>
           <p:cNvSpPr txBox="1"/>
           <p:nvPr/>
         </p:nvSpPr>
         <p:spPr>
           <a:xfrm>
-            <a:off x="1097280" y="1920240"/>
-            <a:ext cx="4663440" cy="640080"/>
-          </a:xfrm>
-          <a:prstGeom prst="rect">
-            <a:avLst/>
-          </a:prstGeom>
-          <a:noFill/>
-          <a:ln/>
-        </p:spPr>
-        <p:txBody>
-          <a:bodyPr wrap="square" lIns="1016" tIns="1016" rIns="1016" bIns="1016" rtlCol="0" anchor="t"/>
+            <a:off x="7498080" y="3977640"/>
+            <a:ext cx="4206240" cy="411480"/>
+          </a:xfrm>
+          <a:prstGeom prst="rect">
+            <a:avLst/>
+          </a:prstGeom>
+          <a:noFill/>
+          <a:ln/>
+        </p:spPr>
+        <p:txBody>
+          <a:bodyPr wrap="square" lIns="0" tIns="0" rIns="0" bIns="0" rtlCol="0" anchor="t"/>
           <a:lstStyle/>
           <a:p>
             <a:pPr algn="l" indent="0" marL="0">
               <a:buNone/>
             </a:pPr>
             <a:r>
+              <a:rPr lang="en-US" sz="1800" b="1" dirty="0">
+                <a:solidFill>
+                  <a:schemeClr val="accent6"/>
+                </a:solidFill>
+                <a:latin typeface="Cambria" pitchFamily="34" charset="0"/>
+                <a:ea typeface="Cambria" pitchFamily="34" charset="-122"/>
+                <a:cs typeface="Cambria" pitchFamily="34" charset="-120"/>
+              </a:rPr>
+              <a:t>What they do not show</a:t>
+            </a:r>
+            <a:endParaRPr lang="en-US" sz="1800" dirty="0"/>
+          </a:p>
+        </p:txBody>
+      </p:sp>
+      <p:sp>
+        <p:nvSpPr>
+          <p:cNvPr id="7" name="Text 4"/>
+          <p:cNvSpPr txBox="1"/>
+          <p:nvPr/>
+        </p:nvSpPr>
+        <p:spPr>
+          <a:xfrm>
+            <a:off x="7498080" y="4434840"/>
+            <a:ext cx="4206240" cy="1371600"/>
+          </a:xfrm>
+          <a:prstGeom prst="rect">
+            <a:avLst/>
+          </a:prstGeom>
+          <a:noFill/>
+          <a:ln/>
+        </p:spPr>
+        <p:txBody>
+          <a:bodyPr wrap="square" lIns="635" tIns="635" rIns="635" bIns="635" rtlCol="0" anchor="t"/>
+          <a:lstStyle/>
+          <a:p>
+            <a:pPr marL="342900" indent="-342900">
+              <a:spcAft>
+                <a:spcPts val="600"/>
+              </a:spcAft>
+              <a:buSzPct val="100000"/>
+              <a:buChar char="•"/>
+            </a:pPr>
+            <a:r>
               <a:rPr lang="en-US" sz="1300" dirty="0">
                 <a:solidFill>
                   <a:schemeClr val="tx1"/>
                 </a:solidFill>
               </a:rPr>
-              <a:t>Daily bank-to-ledger-to-merchant-funds reconciliation, needed only if merchant funds are collected (model B).</a:t>
+              <a:t>Behaviour of a production system or on real data</a:t>
             </a:r>
             <a:endParaRPr lang="en-US" sz="1300" dirty="0"/>
           </a:p>
-        </p:txBody>
-      </p:sp>
-      <p:sp>
-        <p:nvSpPr>
-          <p:cNvPr id="7" name="gap-1"/>
-          <p:cNvSpPr/>
-          <p:nvPr/>
-        </p:nvSpPr>
-        <p:spPr>
-          <a:xfrm>
-            <a:off x="6126480" y="1280160"/>
-            <a:ext cx="5440680" cy="1325880"/>
-          </a:xfrm>
-          <a:prstGeom prst="roundRect">
-            <a:avLst>
-              <a:gd name="adj" fmla="val 5517"/>
-            </a:avLst>
-          </a:prstGeom>
-          <a:solidFill>
-            <a:schemeClr val="bg2"/>
-          </a:solidFill>
-          <a:ln w="9525">
-            <a:solidFill>
-              <a:schemeClr val="bg2"/>
-            </a:solidFill>
-            <a:prstDash val="solid"/>
-          </a:ln>
-        </p:spPr>
-      </p:sp>
-      <p:sp>
-        <p:nvSpPr>
-          <p:cNvPr id="8" name="gdot-1"/>
-          <p:cNvSpPr/>
-          <p:nvPr/>
-        </p:nvSpPr>
-        <p:spPr>
-          <a:xfrm>
-            <a:off x="6355080" y="1554480"/>
-            <a:ext cx="292608" cy="292608"/>
-          </a:xfrm>
-          <a:prstGeom prst="ellipse">
-            <a:avLst/>
-          </a:prstGeom>
-          <a:solidFill>
-            <a:schemeClr val="accent5"/>
-          </a:solidFill>
-          <a:ln w="12700">
-            <a:solidFill>
-              <a:schemeClr val="accent5"/>
-            </a:solidFill>
-            <a:prstDash val="solid"/>
-          </a:ln>
-        </p:spPr>
-      </p:sp>
-      <p:sp>
-        <p:nvSpPr>
-          <p:cNvPr id="9" name="Text 7"/>
+          <a:p>
+            <a:pPr marL="342900" indent="-342900">
+              <a:spcAft>
+                <a:spcPts val="600"/>
+              </a:spcAft>
+              <a:buSzPct val="100000"/>
+              <a:buChar char="•"/>
+            </a:pPr>
+            <a:r>
+              <a:rPr lang="en-US" sz="1300" dirty="0">
+                <a:solidFill>
+                  <a:schemeClr val="tx1"/>
+                </a:solidFill>
+              </a:rPr>
+              <a:t>That business rules (amount units, VAT treatment) are confirmed</a:t>
+            </a:r>
+            <a:endParaRPr lang="en-US" sz="1300" dirty="0"/>
+          </a:p>
+        </p:txBody>
+      </p:sp>
+      <p:sp>
+        <p:nvSpPr>
+          <p:cNvPr id="8" name="Text 5"/>
           <p:cNvSpPr txBox="1"/>
           <p:nvPr/>
         </p:nvSpPr>
         <p:spPr>
           <a:xfrm>
-            <a:off x="6766560" y="1444752"/>
-            <a:ext cx="4663440" cy="457200"/>
-          </a:xfrm>
-          <a:prstGeom prst="rect">
-            <a:avLst/>
-          </a:prstGeom>
-          <a:noFill/>
-          <a:ln/>
-        </p:spPr>
-        <p:txBody>
-          <a:bodyPr wrap="square" lIns="1016" tIns="1016" rIns="1016" bIns="1016" rtlCol="0" anchor="t"/>
+            <a:off x="457200" y="5897880"/>
+            <a:ext cx="11247120" cy="365760"/>
+          </a:xfrm>
+          <a:prstGeom prst="rect">
+            <a:avLst/>
+          </a:prstGeom>
+          <a:noFill/>
+          <a:ln/>
+        </p:spPr>
+        <p:txBody>
+          <a:bodyPr wrap="square" lIns="0" tIns="0" rIns="0" bIns="0" rtlCol="0" anchor="t"/>
           <a:lstStyle/>
           <a:p>
             <a:pPr algn="l" indent="0" marL="0">
               <a:buNone/>
             </a:pPr>
             <a:r>
-              <a:rPr lang="en-US" sz="1700" b="1" dirty="0">
-                <a:solidFill>
-                  <a:schemeClr val="tx1"/>
-                </a:solidFill>
-              </a:rPr>
-              <a:t>Transaction monitoring</a:t>
-            </a:r>
-            <a:endParaRPr lang="en-US" sz="1700" dirty="0"/>
-          </a:p>
-        </p:txBody>
-      </p:sp>
-      <p:sp>
-        <p:nvSpPr>
-          <p:cNvPr id="10" name="Text 8"/>
-          <p:cNvSpPr txBox="1"/>
-          <p:nvPr/>
-        </p:nvSpPr>
-        <p:spPr>
-          <a:xfrm>
-            <a:off x="6766560" y="1920240"/>
-            <a:ext cx="4663440" cy="640080"/>
-          </a:xfrm>
-          <a:prstGeom prst="rect">
-            <a:avLst/>
-          </a:prstGeom>
-          <a:noFill/>
-          <a:ln/>
-        </p:spPr>
-        <p:txBody>
-          <a:bodyPr wrap="square" lIns="1016" tIns="1016" rIns="1016" bIns="1016" rtlCol="0" anchor="t"/>
-          <a:lstStyle/>
-          <a:p>
-            <a:pPr algn="l" indent="0" marL="0">
-              <a:buNone/>
-            </a:pPr>
-            <a:r>
-              <a:rPr lang="en-US" sz="1300" dirty="0">
-                <a:solidFill>
-                  <a:schemeClr val="tx1"/>
-                </a:solidFill>
-              </a:rPr>
-              <a:t>Rules, alerts and case investigation for AML and fraud.</a:t>
-            </a:r>
-            <a:endParaRPr lang="en-US" sz="1300" dirty="0"/>
-          </a:p>
-        </p:txBody>
-      </p:sp>
-      <p:sp>
-        <p:nvSpPr>
-          <p:cNvPr id="11" name="gap-2"/>
-          <p:cNvSpPr/>
-          <p:nvPr/>
-        </p:nvSpPr>
-        <p:spPr>
-          <a:xfrm>
-            <a:off x="457200" y="2834640"/>
-            <a:ext cx="5440680" cy="1325880"/>
-          </a:xfrm>
-          <a:prstGeom prst="roundRect">
-            <a:avLst>
-              <a:gd name="adj" fmla="val 5517"/>
-            </a:avLst>
-          </a:prstGeom>
-          <a:solidFill>
-            <a:schemeClr val="bg2"/>
-          </a:solidFill>
-          <a:ln w="9525">
-            <a:solidFill>
-              <a:schemeClr val="bg2"/>
-            </a:solidFill>
-            <a:prstDash val="solid"/>
-          </a:ln>
-        </p:spPr>
-      </p:sp>
-      <p:sp>
-        <p:nvSpPr>
-          <p:cNvPr id="12" name="gdot-2"/>
-          <p:cNvSpPr/>
-          <p:nvPr/>
-        </p:nvSpPr>
-        <p:spPr>
-          <a:xfrm>
-            <a:off x="685800" y="3108960"/>
-            <a:ext cx="292608" cy="292608"/>
-          </a:xfrm>
-          <a:prstGeom prst="ellipse">
-            <a:avLst/>
-          </a:prstGeom>
-          <a:solidFill>
-            <a:schemeClr val="accent5"/>
-          </a:solidFill>
-          <a:ln w="12700">
-            <a:solidFill>
-              <a:schemeClr val="accent5"/>
-            </a:solidFill>
-            <a:prstDash val="solid"/>
-          </a:ln>
-        </p:spPr>
-      </p:sp>
-      <p:sp>
-        <p:nvSpPr>
-          <p:cNvPr id="13" name="Text 11"/>
-          <p:cNvSpPr txBox="1"/>
-          <p:nvPr/>
-        </p:nvSpPr>
-        <p:spPr>
-          <a:xfrm>
-            <a:off x="1097280" y="2999232"/>
-            <a:ext cx="4663440" cy="457200"/>
-          </a:xfrm>
-          <a:prstGeom prst="rect">
-            <a:avLst/>
-          </a:prstGeom>
-          <a:noFill/>
-          <a:ln/>
-        </p:spPr>
-        <p:txBody>
-          <a:bodyPr wrap="square" lIns="1016" tIns="1016" rIns="1016" bIns="1016" rtlCol="0" anchor="t"/>
-          <a:lstStyle/>
-          <a:p>
-            <a:pPr algn="l" indent="0" marL="0">
-              <a:buNone/>
-            </a:pPr>
-            <a:r>
-              <a:rPr lang="en-US" sz="1700" b="1" dirty="0">
-                <a:solidFill>
-                  <a:schemeClr val="tx1"/>
-                </a:solidFill>
-              </a:rPr>
-              <a:t>Refunds, chargebacks, disputes</a:t>
-            </a:r>
-            <a:endParaRPr lang="en-US" sz="1700" dirty="0"/>
-          </a:p>
-        </p:txBody>
-      </p:sp>
-      <p:sp>
-        <p:nvSpPr>
-          <p:cNvPr id="14" name="Text 12"/>
-          <p:cNvSpPr txBox="1"/>
-          <p:nvPr/>
-        </p:nvSpPr>
-        <p:spPr>
-          <a:xfrm>
-            <a:off x="1097280" y="3474720"/>
-            <a:ext cx="4663440" cy="640080"/>
-          </a:xfrm>
-          <a:prstGeom prst="rect">
-            <a:avLst/>
-          </a:prstGeom>
-          <a:noFill/>
-          <a:ln/>
-        </p:spPr>
-        <p:txBody>
-          <a:bodyPr wrap="square" lIns="1016" tIns="1016" rIns="1016" bIns="1016" rtlCol="0" anchor="t"/>
-          <a:lstStyle/>
-          <a:p>
-            <a:pPr algn="l" indent="0" marL="0">
-              <a:buNone/>
-            </a:pPr>
-            <a:r>
-              <a:rPr lang="en-US" sz="1300" dirty="0">
-                <a:solidFill>
-                  <a:schemeClr val="tx1"/>
-                </a:solidFill>
-              </a:rPr>
-              <a:t>Registers, statuses and deadlines.</a:t>
-            </a:r>
-            <a:endParaRPr lang="en-US" sz="1300" dirty="0"/>
-          </a:p>
-        </p:txBody>
-      </p:sp>
-      <p:sp>
-        <p:nvSpPr>
-          <p:cNvPr id="15" name="gap-3"/>
-          <p:cNvSpPr/>
-          <p:nvPr/>
-        </p:nvSpPr>
-        <p:spPr>
-          <a:xfrm>
-            <a:off x="6126480" y="2834640"/>
-            <a:ext cx="5440680" cy="1325880"/>
-          </a:xfrm>
-          <a:prstGeom prst="roundRect">
-            <a:avLst>
-              <a:gd name="adj" fmla="val 5517"/>
-            </a:avLst>
-          </a:prstGeom>
-          <a:solidFill>
-            <a:schemeClr val="bg2"/>
-          </a:solidFill>
-          <a:ln w="9525">
-            <a:solidFill>
-              <a:schemeClr val="bg2"/>
-            </a:solidFill>
-            <a:prstDash val="solid"/>
-          </a:ln>
-        </p:spPr>
-      </p:sp>
-      <p:sp>
-        <p:nvSpPr>
-          <p:cNvPr id="16" name="gdot-3"/>
-          <p:cNvSpPr/>
-          <p:nvPr/>
-        </p:nvSpPr>
-        <p:spPr>
-          <a:xfrm>
-            <a:off x="6355080" y="3108960"/>
-            <a:ext cx="292608" cy="292608"/>
-          </a:xfrm>
-          <a:prstGeom prst="ellipse">
-            <a:avLst/>
-          </a:prstGeom>
-          <a:solidFill>
-            <a:schemeClr val="accent5"/>
-          </a:solidFill>
-          <a:ln w="12700">
-            <a:solidFill>
-              <a:schemeClr val="accent5"/>
-            </a:solidFill>
-            <a:prstDash val="solid"/>
-          </a:ln>
-        </p:spPr>
-      </p:sp>
-      <p:sp>
-        <p:nvSpPr>
-          <p:cNvPr id="17" name="Text 15"/>
-          <p:cNvSpPr txBox="1"/>
-          <p:nvPr/>
-        </p:nvSpPr>
-        <p:spPr>
-          <a:xfrm>
-            <a:off x="6766560" y="2999232"/>
-            <a:ext cx="4663440" cy="457200"/>
-          </a:xfrm>
-          <a:prstGeom prst="rect">
-            <a:avLst/>
-          </a:prstGeom>
-          <a:noFill/>
-          <a:ln/>
-        </p:spPr>
-        <p:txBody>
-          <a:bodyPr wrap="square" lIns="1016" tIns="1016" rIns="1016" bIns="1016" rtlCol="0" anchor="t"/>
-          <a:lstStyle/>
-          <a:p>
-            <a:pPr algn="l" indent="0" marL="0">
-              <a:buNone/>
-            </a:pPr>
-            <a:r>
-              <a:rPr lang="en-US" sz="1700" b="1" dirty="0">
-                <a:solidFill>
-                  <a:schemeClr val="tx1"/>
-                </a:solidFill>
-              </a:rPr>
-              <a:t>Complaints handling</a:t>
-            </a:r>
-            <a:endParaRPr lang="en-US" sz="1700" dirty="0"/>
-          </a:p>
-        </p:txBody>
-      </p:sp>
-      <p:sp>
-        <p:nvSpPr>
-          <p:cNvPr id="18" name="Text 16"/>
-          <p:cNvSpPr txBox="1"/>
-          <p:nvPr/>
-        </p:nvSpPr>
-        <p:spPr>
-          <a:xfrm>
-            <a:off x="6766560" y="3474720"/>
-            <a:ext cx="4663440" cy="640080"/>
-          </a:xfrm>
-          <a:prstGeom prst="rect">
-            <a:avLst/>
-          </a:prstGeom>
-          <a:noFill/>
-          <a:ln/>
-        </p:spPr>
-        <p:txBody>
-          <a:bodyPr wrap="square" lIns="1016" tIns="1016" rIns="1016" bIns="1016" rtlCol="0" anchor="t"/>
-          <a:lstStyle/>
-          <a:p>
-            <a:pPr algn="l" indent="0" marL="0">
-              <a:buNone/>
-            </a:pPr>
-            <a:r>
-              <a:rPr lang="en-US" sz="1300" dirty="0">
-                <a:solidFill>
-                  <a:schemeClr val="tx1"/>
-                </a:solidFill>
-              </a:rPr>
-              <a:t>Register, response times, escalation.</a:t>
-            </a:r>
-            <a:endParaRPr lang="en-US" sz="1300" dirty="0"/>
-          </a:p>
-        </p:txBody>
-      </p:sp>
-      <p:sp>
-        <p:nvSpPr>
-          <p:cNvPr id="19" name="gap-4"/>
-          <p:cNvSpPr/>
-          <p:nvPr/>
-        </p:nvSpPr>
-        <p:spPr>
-          <a:xfrm>
-            <a:off x="457200" y="4389120"/>
-            <a:ext cx="5440680" cy="1325880"/>
-          </a:xfrm>
-          <a:prstGeom prst="roundRect">
-            <a:avLst>
-              <a:gd name="adj" fmla="val 5517"/>
-            </a:avLst>
-          </a:prstGeom>
-          <a:solidFill>
-            <a:schemeClr val="bg2"/>
-          </a:solidFill>
-          <a:ln w="9525">
-            <a:solidFill>
-              <a:schemeClr val="bg2"/>
-            </a:solidFill>
-            <a:prstDash val="solid"/>
-          </a:ln>
-        </p:spPr>
-      </p:sp>
-      <p:sp>
-        <p:nvSpPr>
-          <p:cNvPr id="20" name="gdot-4"/>
-          <p:cNvSpPr/>
-          <p:nvPr/>
-        </p:nvSpPr>
-        <p:spPr>
-          <a:xfrm>
-            <a:off x="685800" y="4663440"/>
-            <a:ext cx="292608" cy="292608"/>
-          </a:xfrm>
-          <a:prstGeom prst="ellipse">
-            <a:avLst/>
-          </a:prstGeom>
-          <a:solidFill>
-            <a:schemeClr val="accent5"/>
-          </a:solidFill>
-          <a:ln w="12700">
-            <a:solidFill>
-              <a:schemeClr val="accent5"/>
-            </a:solidFill>
-            <a:prstDash val="solid"/>
-          </a:ln>
-        </p:spPr>
-      </p:sp>
-      <p:sp>
-        <p:nvSpPr>
-          <p:cNvPr id="21" name="Text 19"/>
-          <p:cNvSpPr txBox="1"/>
-          <p:nvPr/>
-        </p:nvSpPr>
-        <p:spPr>
-          <a:xfrm>
-            <a:off x="1097280" y="4553712"/>
-            <a:ext cx="4663440" cy="457200"/>
-          </a:xfrm>
-          <a:prstGeom prst="rect">
-            <a:avLst/>
-          </a:prstGeom>
-          <a:noFill/>
-          <a:ln/>
-        </p:spPr>
-        <p:txBody>
-          <a:bodyPr wrap="square" lIns="1016" tIns="1016" rIns="1016" bIns="1016" rtlCol="0" anchor="t"/>
-          <a:lstStyle/>
-          <a:p>
-            <a:pPr algn="l" indent="0" marL="0">
-              <a:buNone/>
-            </a:pPr>
-            <a:r>
-              <a:rPr lang="en-US" sz="1700" b="1" dirty="0">
-                <a:solidFill>
-                  <a:schemeClr val="tx1"/>
-                </a:solidFill>
-              </a:rPr>
-              <a:t>Automated sanctions / PEP screening</a:t>
-            </a:r>
-            <a:endParaRPr lang="en-US" sz="1700" dirty="0"/>
-          </a:p>
-        </p:txBody>
-      </p:sp>
-      <p:sp>
-        <p:nvSpPr>
-          <p:cNvPr id="22" name="Text 20"/>
-          <p:cNvSpPr txBox="1"/>
-          <p:nvPr/>
-        </p:nvSpPr>
-        <p:spPr>
-          <a:xfrm>
-            <a:off x="1097280" y="5029200"/>
-            <a:ext cx="4663440" cy="640080"/>
-          </a:xfrm>
-          <a:prstGeom prst="rect">
-            <a:avLst/>
-          </a:prstGeom>
-          <a:noFill/>
-          <a:ln/>
-        </p:spPr>
-        <p:txBody>
-          <a:bodyPr wrap="square" lIns="1016" tIns="1016" rIns="1016" bIns="1016" rtlCol="0" anchor="t"/>
-          <a:lstStyle/>
-          <a:p>
-            <a:pPr algn="l" indent="0" marL="0">
-              <a:buNone/>
-            </a:pPr>
-            <a:r>
-              <a:rPr lang="en-US" sz="1300" dirty="0">
-                <a:solidFill>
-                  <a:schemeClr val="tx1"/>
-                </a:solidFill>
-              </a:rPr>
-              <a:t>Provider integration, adverse media, ongoing re-screening.</a:t>
-            </a:r>
-            <a:endParaRPr lang="en-US" sz="1300" dirty="0"/>
-          </a:p>
-        </p:txBody>
-      </p:sp>
-      <p:sp>
-        <p:nvSpPr>
-          <p:cNvPr id="23" name="gap-5"/>
-          <p:cNvSpPr/>
-          <p:nvPr/>
-        </p:nvSpPr>
-        <p:spPr>
-          <a:xfrm>
-            <a:off x="6126480" y="4389120"/>
-            <a:ext cx="5440680" cy="1325880"/>
-          </a:xfrm>
-          <a:prstGeom prst="roundRect">
-            <a:avLst>
-              <a:gd name="adj" fmla="val 5517"/>
-            </a:avLst>
-          </a:prstGeom>
-          <a:solidFill>
-            <a:schemeClr val="bg2"/>
-          </a:solidFill>
-          <a:ln w="9525">
-            <a:solidFill>
-              <a:schemeClr val="bg2"/>
-            </a:solidFill>
-            <a:prstDash val="solid"/>
-          </a:ln>
-        </p:spPr>
-      </p:sp>
-      <p:sp>
-        <p:nvSpPr>
-          <p:cNvPr id="24" name="gdot-5"/>
-          <p:cNvSpPr/>
-          <p:nvPr/>
-        </p:nvSpPr>
-        <p:spPr>
-          <a:xfrm>
-            <a:off x="6355080" y="4663440"/>
-            <a:ext cx="292608" cy="292608"/>
-          </a:xfrm>
-          <a:prstGeom prst="ellipse">
-            <a:avLst/>
-          </a:prstGeom>
-          <a:solidFill>
-            <a:schemeClr val="accent5"/>
-          </a:solidFill>
-          <a:ln w="12700">
-            <a:solidFill>
-              <a:schemeClr val="accent5"/>
-            </a:solidFill>
-            <a:prstDash val="solid"/>
-          </a:ln>
-        </p:spPr>
-      </p:sp>
-      <p:sp>
-        <p:nvSpPr>
-          <p:cNvPr id="25" name="Text 23"/>
-          <p:cNvSpPr txBox="1"/>
-          <p:nvPr/>
-        </p:nvSpPr>
-        <p:spPr>
-          <a:xfrm>
-            <a:off x="6766560" y="4553712"/>
-            <a:ext cx="4663440" cy="457200"/>
-          </a:xfrm>
-          <a:prstGeom prst="rect">
-            <a:avLst/>
-          </a:prstGeom>
-          <a:noFill/>
-          <a:ln/>
-        </p:spPr>
-        <p:txBody>
-          <a:bodyPr wrap="square" lIns="1016" tIns="1016" rIns="1016" bIns="1016" rtlCol="0" anchor="t"/>
-          <a:lstStyle/>
-          <a:p>
-            <a:pPr algn="l" indent="0" marL="0">
-              <a:buNone/>
-            </a:pPr>
-            <a:r>
-              <a:rPr lang="en-US" sz="1700" b="1" dirty="0">
-                <a:solidFill>
-                  <a:schemeClr val="tx1"/>
-                </a:solidFill>
-              </a:rPr>
-              <a:t>Production antivirus</a:t>
-            </a:r>
-            <a:endParaRPr lang="en-US" sz="1700" dirty="0"/>
-          </a:p>
-        </p:txBody>
-      </p:sp>
-      <p:sp>
-        <p:nvSpPr>
-          <p:cNvPr id="26" name="Text 24"/>
-          <p:cNvSpPr txBox="1"/>
-          <p:nvPr/>
-        </p:nvSpPr>
-        <p:spPr>
-          <a:xfrm>
-            <a:off x="6766560" y="5029200"/>
-            <a:ext cx="4663440" cy="640080"/>
-          </a:xfrm>
-          <a:prstGeom prst="rect">
-            <a:avLst/>
-          </a:prstGeom>
-          <a:noFill/>
-          <a:ln/>
-        </p:spPr>
-        <p:txBody>
-          <a:bodyPr wrap="square" lIns="1016" tIns="1016" rIns="1016" bIns="1016" rtlCol="0" anchor="t"/>
-          <a:lstStyle/>
-          <a:p>
-            <a:pPr algn="l" indent="0" marL="0">
-              <a:buNone/>
-            </a:pPr>
-            <a:r>
-              <a:rPr lang="en-US" sz="1300" dirty="0">
-                <a:solidFill>
-                  <a:schemeClr val="tx1"/>
-                </a:solidFill>
-              </a:rPr>
-              <a:t>Scanning of every merchant upload, mandatory before go-live.</a:t>
-            </a:r>
-            <a:endParaRPr lang="en-US" sz="1300" dirty="0"/>
-          </a:p>
-        </p:txBody>
-      </p:sp>
-      <p:sp>
-        <p:nvSpPr>
-          <p:cNvPr id="27" name="Text 25"/>
-          <p:cNvSpPr txBox="1"/>
-          <p:nvPr/>
-        </p:nvSpPr>
-        <p:spPr>
-          <a:xfrm>
-            <a:off x="457200" y="5943600"/>
-            <a:ext cx="11247120" cy="365760"/>
-          </a:xfrm>
-          <a:prstGeom prst="rect">
-            <a:avLst/>
-          </a:prstGeom>
-          <a:noFill/>
-          <a:ln/>
-        </p:spPr>
-        <p:txBody>
-          <a:bodyPr wrap="square" lIns="0" tIns="0" rIns="0" bIns="0" rtlCol="0" anchor="t"/>
-          <a:lstStyle/>
-          <a:p>
-            <a:pPr algn="l" indent="0" marL="0">
-              <a:buNone/>
-            </a:pPr>
-            <a:r>
               <a:rPr lang="en-US" sz="1300" i="1" dirty="0">
                 <a:solidFill>
                   <a:schemeClr val="tx2"/>
                 </a:solidFill>
               </a:rPr>
-              <a:t>These items are specified or identified, not built. No timeline is committed in this draft.</a:t>
+              <a:t>Development prototype. Tests run on a disposable database; they do not replace testing of the production system.</a:t>
             </a:r>
             <a:endParaRPr lang="en-US" sz="1300" dirty="0"/>
           </a:p>

--- a/outputs/recap/MIPS-platform-BoM-EN-DRAFT.pptx
+++ b/outputs/recap/MIPS-platform-BoM-EN-DRAFT.pptx
@@ -116,13 +116,13 @@
   <p:extLst>
     <p:ext uri="{521415D9-36F7-43E2-AB2F-B90AF26B5E84}">
       <p14:sectionLst xmlns:p14="http://schemas.microsoft.com/office/powerpoint/2010/main">
-        <p14:section name="Overview" id="{6bc2731f-356b-27aa-f8bb-5e22d4e40aaf}">
+        <p14:section name="Overview" id="{5c712321-0696-79dd-b727-b71167c268ae}">
           <p14:sldIdLst>
             <p14:sldId id="256"/>
             <p14:sldId id="257"/>
           </p14:sldIdLst>
         </p14:section>
-        <p14:section name="Platform" id="{3b9134ec-61fd-ae36-7829-5df14e6e48b7}">
+        <p14:section name="Platform" id="{cb4a3165-a049-fbef-6e57-868e480cd28f}">
           <p14:sldIdLst>
             <p14:sldId id="258"/>
             <p14:sldId id="259"/>
@@ -130,7 +130,7 @@
             <p14:sldId id="261"/>
           </p14:sldIdLst>
         </p14:section>
-        <p14:section name="Funds and evidence" id="{81423aae-6eb2-4098-5153-9c63bf8b28c4}">
+        <p14:section name="Funds and evidence" id="{f47da07f-2fd8-e6d7-2aaa-3a9e0204a45c}">
           <p14:sldIdLst>
             <p14:sldId id="262"/>
             <p14:sldId id="263"/>
@@ -1334,7 +1334,7 @@
           <a:p>
             <a:r>
               <a:rPr lang="en-US" dirty="0"/>
-              <a:t>INTERNAL. The tests led to two security fixes in the prototype (sign-in lockout per account instead of per IP; password-change time stored to the microsecond). They are deliberately not described here: development history, not a control. Mention them only if asked how the tests were used. The "2FA mandatory for finance and admin" rule is not covered by the automated tests: the test configuration switches it off.</a:t>
+              <a:t>INTERNAL. The tests led to three fixes in the prototype: sign-in lockout per account instead of per IP; password-change time stored to the microsecond; four-eyes on case decisions extended to everyone who handled the case (an analyst with approver rights could reassign a case and decide it). They are deliberately not described here: development history, not a control. Mention them only if asked how the tests were used. Thirteen deliberate faults introduced in the code were all detected. The mandatory staff 2FA is tested with the rule switched on, as in production.</a:t>
             </a:r>
             <a:endParaRPr lang="en-US" dirty="0"/>
           </a:p>
@@ -3438,7 +3438,7 @@
                 <a:ea typeface="Cambria" pitchFamily="34" charset="-122"/>
                 <a:cs typeface="Cambria" pitchFamily="34" charset="-120"/>
               </a:rPr>
-              <a:t>478</a:t>
+              <a:t>579</a:t>
             </a:r>
             <a:endParaRPr lang="en-US" sz="5000" dirty="0"/>
           </a:p>
@@ -7515,7 +7515,7 @@
                   <a:schemeClr val="tx1"/>
                 </a:solidFill>
               </a:rPr>
-              <a:t>A document is accepted by someone other than its uploader. A case is approved by an approver other than the analyst.</a:t>
+              <a:t>A document is accepted by someone other than its uploader. A case is decided by an approver who never handled it: not its creator, nor any past or present analyst.</a:t>
             </a:r>
             <a:endParaRPr lang="en-US" sz="1300" dirty="0"/>
           </a:p>
@@ -12911,7 +12911,7 @@
                 <a:gridCol w="5669280"/>
                 <a:gridCol w="1005840"/>
               </a:tblGrid>
-              <a:tr h="411480">
+              <a:tr h="393192">
                 <a:tc>
                   <a:txBody>
                     <a:bodyPr/>
@@ -13035,7 +13035,7 @@
                   </a:tcPr>
                 </a:tc>
               </a:tr>
-              <a:tr h="411480">
+              <a:tr h="393192">
                 <a:tc>
                   <a:txBody>
                     <a:bodyPr/>
@@ -13153,7 +13153,7 @@
                   </a:tcPr>
                 </a:tc>
               </a:tr>
-              <a:tr h="411480">
+              <a:tr h="393192">
                 <a:tc>
                   <a:txBody>
                     <a:bodyPr/>
@@ -13271,7 +13271,125 @@
                   </a:tcPr>
                 </a:tc>
               </a:tr>
-              <a:tr h="411480">
+              <a:tr h="393192">
+                <a:tc>
+                  <a:txBody>
+                    <a:bodyPr/>
+                    <a:lstStyle/>
+                    <a:p>
+                      <a:pPr indent="0" marL="0">
+                        <a:buNone/>
+                      </a:pPr>
+                      <a:r>
+                        <a:rPr lang="en-US" sz="1300" dirty="0">
+                          <a:solidFill>
+                            <a:schemeClr val="tx1"/>
+                          </a:solidFill>
+                        </a:rPr>
+                        <a:t>Case approval: each blocker, approver role, four-eyes decision</a:t>
+                      </a:r>
+                      <a:endParaRPr lang="en-US" sz="1300" dirty="0"/>
+                    </a:p>
+                  </a:txBody>
+                  <a:tcPr marL="54864" marR="54864" marT="54864" marB="54864" anchor="ctr">
+                    <a:lnL w="6350" cap="flat" cmpd="sng" algn="ctr">
+                      <a:solidFill>
+                        <a:srgbClr val="D5DDE7"/>
+                      </a:solidFill>
+                      <a:prstDash val="solid"/>
+                      <a:round/>
+                      <a:headEnd type="none" w="med" len="med"/>
+                      <a:tailEnd type="none" w="med" len="med"/>
+                    </a:lnL>
+                    <a:lnR w="6350" cap="flat" cmpd="sng" algn="ctr">
+                      <a:solidFill>
+                        <a:srgbClr val="D5DDE7"/>
+                      </a:solidFill>
+                      <a:prstDash val="solid"/>
+                      <a:round/>
+                      <a:headEnd type="none" w="med" len="med"/>
+                      <a:tailEnd type="none" w="med" len="med"/>
+                    </a:lnR>
+                    <a:lnT w="6350" cap="flat" cmpd="sng" algn="ctr">
+                      <a:solidFill>
+                        <a:srgbClr val="D5DDE7"/>
+                      </a:solidFill>
+                      <a:prstDash val="solid"/>
+                      <a:round/>
+                      <a:headEnd type="none" w="med" len="med"/>
+                      <a:tailEnd type="none" w="med" len="med"/>
+                    </a:lnT>
+                    <a:lnB w="6350" cap="flat" cmpd="sng" algn="ctr">
+                      <a:solidFill>
+                        <a:srgbClr val="D5DDE7"/>
+                      </a:solidFill>
+                      <a:prstDash val="solid"/>
+                      <a:round/>
+                      <a:headEnd type="none" w="med" len="med"/>
+                      <a:tailEnd type="none" w="med" len="med"/>
+                    </a:lnB>
+                  </a:tcPr>
+                </a:tc>
+                <a:tc>
+                  <a:txBody>
+                    <a:bodyPr/>
+                    <a:lstStyle/>
+                    <a:p>
+                      <a:pPr algn="r" indent="0" marL="0">
+                        <a:buNone/>
+                      </a:pPr>
+                      <a:r>
+                        <a:rPr lang="en-US" sz="1300" dirty="0">
+                          <a:solidFill>
+                            <a:schemeClr val="tx1"/>
+                          </a:solidFill>
+                        </a:rPr>
+                        <a:t>78</a:t>
+                      </a:r>
+                      <a:endParaRPr lang="en-US" sz="1300" dirty="0"/>
+                    </a:p>
+                  </a:txBody>
+                  <a:tcPr marL="54864" marR="54864" marT="54864" marB="54864" anchor="ctr">
+                    <a:lnL w="6350" cap="flat" cmpd="sng" algn="ctr">
+                      <a:solidFill>
+                        <a:srgbClr val="D5DDE7"/>
+                      </a:solidFill>
+                      <a:prstDash val="solid"/>
+                      <a:round/>
+                      <a:headEnd type="none" w="med" len="med"/>
+                      <a:tailEnd type="none" w="med" len="med"/>
+                    </a:lnL>
+                    <a:lnR w="6350" cap="flat" cmpd="sng" algn="ctr">
+                      <a:solidFill>
+                        <a:srgbClr val="D5DDE7"/>
+                      </a:solidFill>
+                      <a:prstDash val="solid"/>
+                      <a:round/>
+                      <a:headEnd type="none" w="med" len="med"/>
+                      <a:tailEnd type="none" w="med" len="med"/>
+                    </a:lnR>
+                    <a:lnT w="6350" cap="flat" cmpd="sng" algn="ctr">
+                      <a:solidFill>
+                        <a:srgbClr val="D5DDE7"/>
+                      </a:solidFill>
+                      <a:prstDash val="solid"/>
+                      <a:round/>
+                      <a:headEnd type="none" w="med" len="med"/>
+                      <a:tailEnd type="none" w="med" len="med"/>
+                    </a:lnT>
+                    <a:lnB w="6350" cap="flat" cmpd="sng" algn="ctr">
+                      <a:solidFill>
+                        <a:srgbClr val="D5DDE7"/>
+                      </a:solidFill>
+                      <a:prstDash val="solid"/>
+                      <a:round/>
+                      <a:headEnd type="none" w="med" len="med"/>
+                      <a:tailEnd type="none" w="med" len="med"/>
+                    </a:lnB>
+                  </a:tcPr>
+                </a:tc>
+              </a:tr>
+              <a:tr h="393192">
                 <a:tc>
                   <a:txBody>
                     <a:bodyPr/>
@@ -13389,7 +13507,7 @@
                   </a:tcPr>
                 </a:tc>
               </a:tr>
-              <a:tr h="411480">
+              <a:tr h="393192">
                 <a:tc>
                   <a:txBody>
                     <a:bodyPr/>
@@ -13507,7 +13625,7 @@
                   </a:tcPr>
                 </a:tc>
               </a:tr>
-              <a:tr h="411480">
+              <a:tr h="393192">
                 <a:tc>
                   <a:txBody>
                     <a:bodyPr/>
@@ -13625,7 +13743,7 @@
                   </a:tcPr>
                 </a:tc>
               </a:tr>
-              <a:tr h="411480">
+              <a:tr h="393192">
                 <a:tc>
                   <a:txBody>
                     <a:bodyPr/>
@@ -13743,7 +13861,7 @@
                   </a:tcPr>
                 </a:tc>
               </a:tr>
-              <a:tr h="411480">
+              <a:tr h="393192">
                 <a:tc>
                   <a:txBody>
                     <a:bodyPr/>
@@ -13861,7 +13979,125 @@
                   </a:tcPr>
                 </a:tc>
               </a:tr>
-              <a:tr h="411480">
+              <a:tr h="393192">
+                <a:tc>
+                  <a:txBody>
+                    <a:bodyPr/>
+                    <a:lstStyle/>
+                    <a:p>
+                      <a:pPr indent="0" marL="0">
+                        <a:buNone/>
+                      </a:pPr>
+                      <a:r>
+                        <a:rPr lang="en-US" sz="1300" dirty="0">
+                          <a:solidFill>
+                            <a:schemeClr val="tx1"/>
+                          </a:solidFill>
+                        </a:rPr>
+                        <a:t>Mandatory two-factor authentication for staff</a:t>
+                      </a:r>
+                      <a:endParaRPr lang="en-US" sz="1300" dirty="0"/>
+                    </a:p>
+                  </a:txBody>
+                  <a:tcPr marL="54864" marR="54864" marT="54864" marB="54864" anchor="ctr">
+                    <a:lnL w="6350" cap="flat" cmpd="sng" algn="ctr">
+                      <a:solidFill>
+                        <a:srgbClr val="D5DDE7"/>
+                      </a:solidFill>
+                      <a:prstDash val="solid"/>
+                      <a:round/>
+                      <a:headEnd type="none" w="med" len="med"/>
+                      <a:tailEnd type="none" w="med" len="med"/>
+                    </a:lnL>
+                    <a:lnR w="6350" cap="flat" cmpd="sng" algn="ctr">
+                      <a:solidFill>
+                        <a:srgbClr val="D5DDE7"/>
+                      </a:solidFill>
+                      <a:prstDash val="solid"/>
+                      <a:round/>
+                      <a:headEnd type="none" w="med" len="med"/>
+                      <a:tailEnd type="none" w="med" len="med"/>
+                    </a:lnR>
+                    <a:lnT w="6350" cap="flat" cmpd="sng" algn="ctr">
+                      <a:solidFill>
+                        <a:srgbClr val="D5DDE7"/>
+                      </a:solidFill>
+                      <a:prstDash val="solid"/>
+                      <a:round/>
+                      <a:headEnd type="none" w="med" len="med"/>
+                      <a:tailEnd type="none" w="med" len="med"/>
+                    </a:lnT>
+                    <a:lnB w="6350" cap="flat" cmpd="sng" algn="ctr">
+                      <a:solidFill>
+                        <a:srgbClr val="D5DDE7"/>
+                      </a:solidFill>
+                      <a:prstDash val="solid"/>
+                      <a:round/>
+                      <a:headEnd type="none" w="med" len="med"/>
+                      <a:tailEnd type="none" w="med" len="med"/>
+                    </a:lnB>
+                  </a:tcPr>
+                </a:tc>
+                <a:tc>
+                  <a:txBody>
+                    <a:bodyPr/>
+                    <a:lstStyle/>
+                    <a:p>
+                      <a:pPr algn="r" indent="0" marL="0">
+                        <a:buNone/>
+                      </a:pPr>
+                      <a:r>
+                        <a:rPr lang="en-US" sz="1300" dirty="0">
+                          <a:solidFill>
+                            <a:schemeClr val="tx1"/>
+                          </a:solidFill>
+                        </a:rPr>
+                        <a:t>23</a:t>
+                      </a:r>
+                      <a:endParaRPr lang="en-US" sz="1300" dirty="0"/>
+                    </a:p>
+                  </a:txBody>
+                  <a:tcPr marL="54864" marR="54864" marT="54864" marB="54864" anchor="ctr">
+                    <a:lnL w="6350" cap="flat" cmpd="sng" algn="ctr">
+                      <a:solidFill>
+                        <a:srgbClr val="D5DDE7"/>
+                      </a:solidFill>
+                      <a:prstDash val="solid"/>
+                      <a:round/>
+                      <a:headEnd type="none" w="med" len="med"/>
+                      <a:tailEnd type="none" w="med" len="med"/>
+                    </a:lnL>
+                    <a:lnR w="6350" cap="flat" cmpd="sng" algn="ctr">
+                      <a:solidFill>
+                        <a:srgbClr val="D5DDE7"/>
+                      </a:solidFill>
+                      <a:prstDash val="solid"/>
+                      <a:round/>
+                      <a:headEnd type="none" w="med" len="med"/>
+                      <a:tailEnd type="none" w="med" len="med"/>
+                    </a:lnR>
+                    <a:lnT w="6350" cap="flat" cmpd="sng" algn="ctr">
+                      <a:solidFill>
+                        <a:srgbClr val="D5DDE7"/>
+                      </a:solidFill>
+                      <a:prstDash val="solid"/>
+                      <a:round/>
+                      <a:headEnd type="none" w="med" len="med"/>
+                      <a:tailEnd type="none" w="med" len="med"/>
+                    </a:lnT>
+                    <a:lnB w="6350" cap="flat" cmpd="sng" algn="ctr">
+                      <a:solidFill>
+                        <a:srgbClr val="D5DDE7"/>
+                      </a:solidFill>
+                      <a:prstDash val="solid"/>
+                      <a:round/>
+                      <a:headEnd type="none" w="med" len="med"/>
+                      <a:tailEnd type="none" w="med" len="med"/>
+                    </a:lnB>
+                  </a:tcPr>
+                </a:tc>
+              </a:tr>
+              <a:tr h="393192">
                 <a:tc>
                   <a:txBody>
                     <a:bodyPr/>

--- a/outputs/recap/MIPS-platform-BoM-EN-DRAFT.pptx
+++ b/outputs/recap/MIPS-platform-BoM-EN-DRAFT.pptx
@@ -116,13 +116,13 @@
   <p:extLst>
     <p:ext uri="{521415D9-36F7-43E2-AB2F-B90AF26B5E84}">
       <p14:sectionLst xmlns:p14="http://schemas.microsoft.com/office/powerpoint/2010/main">
-        <p14:section name="Overview" id="{5c712321-0696-79dd-b727-b71167c268ae}">
+        <p14:section name="Overview" id="{edc8450b-bfb9-f322-92df-a45a55511e19}">
           <p14:sldIdLst>
             <p14:sldId id="256"/>
             <p14:sldId id="257"/>
           </p14:sldIdLst>
         </p14:section>
-        <p14:section name="Platform" id="{cb4a3165-a049-fbef-6e57-868e480cd28f}">
+        <p14:section name="Platform" id="{c4404682-e9f3-6a92-8923-98332d470c60}">
           <p14:sldIdLst>
             <p14:sldId id="258"/>
             <p14:sldId id="259"/>
@@ -130,7 +130,7 @@
             <p14:sldId id="261"/>
           </p14:sldIdLst>
         </p14:section>
-        <p14:section name="Funds and evidence" id="{f47da07f-2fd8-e6d7-2aaa-3a9e0204a45c}">
+        <p14:section name="Funds and evidence" id="{7b7be38a-2764-7d51-774d-c05d294179e9}">
           <p14:sldIdLst>
             <p14:sldId id="262"/>
             <p14:sldId id="263"/>
@@ -894,7 +894,7 @@
           <a:p>
             <a:r>
               <a:rPr lang="en-US" dirty="0"/>
-              <a:t>Approval requires: every required document accepted, at least one director and one beneficial owner, shareholders above the threshold recorded as beneficial owners, every person screened clear, a risk rating (high if a PEP is involved), legal name and BRN. Thresholds are default values pending compliance validation.</a:t>
+              <a:t>Approval requires: every required document accepted, at least one director and one beneficial owner, shareholders above the threshold recorded as beneficial owners, every person screened clear, a risk rating (high if a PEP is involved), legal name and BRN. The decision is taken by an approver who never handled the case: not its creator, analyst or anyone who reassigned it. Thresholds are default values pending compliance validation.</a:t>
             </a:r>
             <a:endParaRPr lang="en-US" dirty="0"/>
           </a:p>
@@ -7052,7 +7052,7 @@
                   <a:schemeClr val="tx2"/>
                 </a:solidFill>
               </a:rPr>
-              <a:t>approver ≠ analyst</a:t>
+              <a:t>approver never involved</a:t>
             </a:r>
             <a:endParaRPr lang="en-US" sz="1200" dirty="0"/>
           </a:p>

--- a/outputs/recap/MIPS-platform-BoM-EN-DRAFT.pptx
+++ b/outputs/recap/MIPS-platform-BoM-EN-DRAFT.pptx
@@ -116,13 +116,13 @@
   <p:extLst>
     <p:ext uri="{521415D9-36F7-43E2-AB2F-B90AF26B5E84}">
       <p14:sectionLst xmlns:p14="http://schemas.microsoft.com/office/powerpoint/2010/main">
-        <p14:section name="Overview" id="{edc8450b-bfb9-f322-92df-a45a55511e19}">
+        <p14:section name="Overview" id="{014dccf2-394f-a1a7-ac89-fdb3e6935ea8}">
           <p14:sldIdLst>
             <p14:sldId id="256"/>
             <p14:sldId id="257"/>
           </p14:sldIdLst>
         </p14:section>
-        <p14:section name="Platform" id="{c4404682-e9f3-6a92-8923-98332d470c60}">
+        <p14:section name="Platform" id="{00db01eb-a321-0082-d769-eb9507105c35}">
           <p14:sldIdLst>
             <p14:sldId id="258"/>
             <p14:sldId id="259"/>
@@ -130,7 +130,7 @@
             <p14:sldId id="261"/>
           </p14:sldIdLst>
         </p14:section>
-        <p14:section name="Funds and evidence" id="{7b7be38a-2764-7d51-774d-c05d294179e9}">
+        <p14:section name="Funds and evidence" id="{a6077f6d-af66-5103-e4d4-189f06fd0e5b}">
           <p14:sldIdLst>
             <p14:sldId id="262"/>
             <p14:sldId id="263"/>
@@ -1334,7 +1334,7 @@
           <a:p>
             <a:r>
               <a:rPr lang="en-US" dirty="0"/>
-              <a:t>INTERNAL. The tests led to three fixes in the prototype: sign-in lockout per account instead of per IP; password-change time stored to the microsecond; four-eyes on case decisions extended to everyone who handled the case (an analyst with approver rights could reassign a case and decide it). They are deliberately not described here: development history, not a control. Mention them only if asked how the tests were used. Thirteen deliberate faults introduced in the code were all detected. The mandatory staff 2FA is tested with the rule switched on, as in production.</a:t>
+              <a:t>INTERNAL. The tests led to three fixes in the prototype: sign-in lockout per account instead of per IP; password-change time stored to the microsecond; four-eyes on case decisions extended to everyone who handled the case (an analyst with approver rights could reassign a case and decide it). They are deliberately not described here: development history, not a control. Mention them only if asked how the tests were used. Fourteen deliberate faults introduced in the code were all detected. The ClamAV suite uses a one-line test signature (EICAR): the official databases could not be downloaded in the test environment. The mandatory staff 2FA is tested with the rule switched on, as in production.</a:t>
             </a:r>
             <a:endParaRPr lang="en-US" dirty="0"/>
           </a:p>
@@ -2922,7 +2922,7 @@
                   <a:schemeClr val="tx1"/>
                 </a:solidFill>
               </a:rPr>
-              <a:t>Scanning of every merchant upload, mandatory before go-live.</a:t>
+              <a:t>ClamAV integration tested (refuses uploads when unavailable); to install with official signatures, mandatory before go-live.</a:t>
             </a:r>
             <a:endParaRPr lang="en-US" sz="1300" dirty="0"/>
           </a:p>
@@ -2958,7 +2958,7 @@
                   <a:schemeClr val="tx2"/>
                 </a:solidFill>
               </a:rPr>
-              <a:t>These items are specified or identified, not built. No timeline is committed in this draft.</a:t>
+              <a:t>These items are specified or identified, not built (the antivirus integration is built and tested, not yet installed). No timeline is committed in this draft.</a:t>
             </a:r>
             <a:endParaRPr lang="en-US" sz="1300" dirty="0"/>
           </a:p>
@@ -3438,7 +3438,7 @@
                 <a:ea typeface="Cambria" pitchFamily="34" charset="-122"/>
                 <a:cs typeface="Cambria" pitchFamily="34" charset="-120"/>
               </a:rPr>
-              <a:t>579</a:t>
+              <a:t>590</a:t>
             </a:r>
             <a:endParaRPr lang="en-US" sz="5000" dirty="0"/>
           </a:p>
@@ -12911,7 +12911,7 @@
                 <a:gridCol w="5669280"/>
                 <a:gridCol w="1005840"/>
               </a:tblGrid>
-              <a:tr h="393192">
+              <a:tr h="365760">
                 <a:tc>
                   <a:txBody>
                     <a:bodyPr/>
@@ -13035,7 +13035,7 @@
                   </a:tcPr>
                 </a:tc>
               </a:tr>
-              <a:tr h="393192">
+              <a:tr h="365760">
                 <a:tc>
                   <a:txBody>
                     <a:bodyPr/>
@@ -13153,7 +13153,7 @@
                   </a:tcPr>
                 </a:tc>
               </a:tr>
-              <a:tr h="393192">
+              <a:tr h="365760">
                 <a:tc>
                   <a:txBody>
                     <a:bodyPr/>
@@ -13271,7 +13271,7 @@
                   </a:tcPr>
                 </a:tc>
               </a:tr>
-              <a:tr h="393192">
+              <a:tr h="365760">
                 <a:tc>
                   <a:txBody>
                     <a:bodyPr/>
@@ -13389,7 +13389,7 @@
                   </a:tcPr>
                 </a:tc>
               </a:tr>
-              <a:tr h="393192">
+              <a:tr h="365760">
                 <a:tc>
                   <a:txBody>
                     <a:bodyPr/>
@@ -13507,7 +13507,7 @@
                   </a:tcPr>
                 </a:tc>
               </a:tr>
-              <a:tr h="393192">
+              <a:tr h="365760">
                 <a:tc>
                   <a:txBody>
                     <a:bodyPr/>
@@ -13625,7 +13625,7 @@
                   </a:tcPr>
                 </a:tc>
               </a:tr>
-              <a:tr h="393192">
+              <a:tr h="365760">
                 <a:tc>
                   <a:txBody>
                     <a:bodyPr/>
@@ -13743,7 +13743,7 @@
                   </a:tcPr>
                 </a:tc>
               </a:tr>
-              <a:tr h="393192">
+              <a:tr h="365760">
                 <a:tc>
                   <a:txBody>
                     <a:bodyPr/>
@@ -13861,7 +13861,7 @@
                   </a:tcPr>
                 </a:tc>
               </a:tr>
-              <a:tr h="393192">
+              <a:tr h="365760">
                 <a:tc>
                   <a:txBody>
                     <a:bodyPr/>
@@ -13979,7 +13979,125 @@
                   </a:tcPr>
                 </a:tc>
               </a:tr>
-              <a:tr h="393192">
+              <a:tr h="365760">
+                <a:tc>
+                  <a:txBody>
+                    <a:bodyPr/>
+                    <a:lstStyle/>
+                    <a:p>
+                      <a:pPr indent="0" marL="0">
+                        <a:buNone/>
+                      </a:pPr>
+                      <a:r>
+                        <a:rPr lang="en-US" sz="1300" dirty="0">
+                          <a:solidFill>
+                            <a:schemeClr val="tx1"/>
+                          </a:solidFill>
+                        </a:rPr>
+                        <a:t>Upload antivirus with the ClamAV engine (test signature)</a:t>
+                      </a:r>
+                      <a:endParaRPr lang="en-US" sz="1300" dirty="0"/>
+                    </a:p>
+                  </a:txBody>
+                  <a:tcPr marL="54864" marR="54864" marT="54864" marB="54864" anchor="ctr">
+                    <a:lnL w="6350" cap="flat" cmpd="sng" algn="ctr">
+                      <a:solidFill>
+                        <a:srgbClr val="D5DDE7"/>
+                      </a:solidFill>
+                      <a:prstDash val="solid"/>
+                      <a:round/>
+                      <a:headEnd type="none" w="med" len="med"/>
+                      <a:tailEnd type="none" w="med" len="med"/>
+                    </a:lnL>
+                    <a:lnR w="6350" cap="flat" cmpd="sng" algn="ctr">
+                      <a:solidFill>
+                        <a:srgbClr val="D5DDE7"/>
+                      </a:solidFill>
+                      <a:prstDash val="solid"/>
+                      <a:round/>
+                      <a:headEnd type="none" w="med" len="med"/>
+                      <a:tailEnd type="none" w="med" len="med"/>
+                    </a:lnR>
+                    <a:lnT w="6350" cap="flat" cmpd="sng" algn="ctr">
+                      <a:solidFill>
+                        <a:srgbClr val="D5DDE7"/>
+                      </a:solidFill>
+                      <a:prstDash val="solid"/>
+                      <a:round/>
+                      <a:headEnd type="none" w="med" len="med"/>
+                      <a:tailEnd type="none" w="med" len="med"/>
+                    </a:lnT>
+                    <a:lnB w="6350" cap="flat" cmpd="sng" algn="ctr">
+                      <a:solidFill>
+                        <a:srgbClr val="D5DDE7"/>
+                      </a:solidFill>
+                      <a:prstDash val="solid"/>
+                      <a:round/>
+                      <a:headEnd type="none" w="med" len="med"/>
+                      <a:tailEnd type="none" w="med" len="med"/>
+                    </a:lnB>
+                  </a:tcPr>
+                </a:tc>
+                <a:tc>
+                  <a:txBody>
+                    <a:bodyPr/>
+                    <a:lstStyle/>
+                    <a:p>
+                      <a:pPr algn="r" indent="0" marL="0">
+                        <a:buNone/>
+                      </a:pPr>
+                      <a:r>
+                        <a:rPr lang="en-US" sz="1300" dirty="0">
+                          <a:solidFill>
+                            <a:schemeClr val="tx1"/>
+                          </a:solidFill>
+                        </a:rPr>
+                        <a:t>11</a:t>
+                      </a:r>
+                      <a:endParaRPr lang="en-US" sz="1300" dirty="0"/>
+                    </a:p>
+                  </a:txBody>
+                  <a:tcPr marL="54864" marR="54864" marT="54864" marB="54864" anchor="ctr">
+                    <a:lnL w="6350" cap="flat" cmpd="sng" algn="ctr">
+                      <a:solidFill>
+                        <a:srgbClr val="D5DDE7"/>
+                      </a:solidFill>
+                      <a:prstDash val="solid"/>
+                      <a:round/>
+                      <a:headEnd type="none" w="med" len="med"/>
+                      <a:tailEnd type="none" w="med" len="med"/>
+                    </a:lnL>
+                    <a:lnR w="6350" cap="flat" cmpd="sng" algn="ctr">
+                      <a:solidFill>
+                        <a:srgbClr val="D5DDE7"/>
+                      </a:solidFill>
+                      <a:prstDash val="solid"/>
+                      <a:round/>
+                      <a:headEnd type="none" w="med" len="med"/>
+                      <a:tailEnd type="none" w="med" len="med"/>
+                    </a:lnR>
+                    <a:lnT w="6350" cap="flat" cmpd="sng" algn="ctr">
+                      <a:solidFill>
+                        <a:srgbClr val="D5DDE7"/>
+                      </a:solidFill>
+                      <a:prstDash val="solid"/>
+                      <a:round/>
+                      <a:headEnd type="none" w="med" len="med"/>
+                      <a:tailEnd type="none" w="med" len="med"/>
+                    </a:lnT>
+                    <a:lnB w="6350" cap="flat" cmpd="sng" algn="ctr">
+                      <a:solidFill>
+                        <a:srgbClr val="D5DDE7"/>
+                      </a:solidFill>
+                      <a:prstDash val="solid"/>
+                      <a:round/>
+                      <a:headEnd type="none" w="med" len="med"/>
+                      <a:tailEnd type="none" w="med" len="med"/>
+                    </a:lnB>
+                  </a:tcPr>
+                </a:tc>
+              </a:tr>
+              <a:tr h="365760">
                 <a:tc>
                   <a:txBody>
                     <a:bodyPr/>
@@ -14097,7 +14215,7 @@
                   </a:tcPr>
                 </a:tc>
               </a:tr>
-              <a:tr h="393192">
+              <a:tr h="365760">
                 <a:tc>
                   <a:txBody>
                     <a:bodyPr/>
@@ -14426,6 +14544,24 @@
                 </a:solidFill>
               </a:rPr>
               <a:t>That business rules (amount units, VAT treatment) are confirmed</a:t>
+            </a:r>
+            <a:endParaRPr lang="en-US" sz="1300" dirty="0"/>
+          </a:p>
+          <a:p>
+            <a:pPr marL="342900" indent="-342900">
+              <a:spcAft>
+                <a:spcPts val="600"/>
+              </a:spcAft>
+              <a:buSzPct val="100000"/>
+              <a:buChar char="•"/>
+            </a:pPr>
+            <a:r>
+              <a:rPr lang="en-US" sz="1300" dirty="0">
+                <a:solidFill>
+                  <a:schemeClr val="tx1"/>
+                </a:solidFill>
+              </a:rPr>
+              <a:t>Antivirus detection rate: a test signature is used, not the official database</a:t>
             </a:r>
             <a:endParaRPr lang="en-US" sz="1300" dirty="0"/>
           </a:p>

--- a/outputs/recap/MIPS-platform-BoM-EN-DRAFT.pptx
+++ b/outputs/recap/MIPS-platform-BoM-EN-DRAFT.pptx
@@ -116,13 +116,13 @@
   <p:extLst>
     <p:ext uri="{521415D9-36F7-43E2-AB2F-B90AF26B5E84}">
       <p14:sectionLst xmlns:p14="http://schemas.microsoft.com/office/powerpoint/2010/main">
-        <p14:section name="Overview" id="{014dccf2-394f-a1a7-ac89-fdb3e6935ea8}">
+        <p14:section name="Overview" id="{5dd9d223-20ca-0f3d-f5cc-f3bebfccc7d3}">
           <p14:sldIdLst>
             <p14:sldId id="256"/>
             <p14:sldId id="257"/>
           </p14:sldIdLst>
         </p14:section>
-        <p14:section name="Platform" id="{00db01eb-a321-0082-d769-eb9507105c35}">
+        <p14:section name="Platform" id="{62108798-a0d6-a830-21dc-f7c796eaffd9}">
           <p14:sldIdLst>
             <p14:sldId id="258"/>
             <p14:sldId id="259"/>
@@ -130,7 +130,7 @@
             <p14:sldId id="261"/>
           </p14:sldIdLst>
         </p14:section>
-        <p14:section name="Funds and evidence" id="{a6077f6d-af66-5103-e4d4-189f06fd0e5b}">
+        <p14:section name="Funds and evidence" id="{6f7f51b0-8160-2bf6-d068-9f5810959001}">
           <p14:sldIdLst>
             <p14:sldId id="262"/>
             <p14:sldId id="263"/>
@@ -1246,7 +1246,7 @@
           <a:p>
             <a:r>
               <a:rPr lang="en-US" dirty="0"/>
-              <a:t/>
+              <a:t>S04d was recaptured on 30 October with ClamAV running the official signature databases: each upload shows "antivirus OK", meaning no known signature was detected, not that the file is guaranteed safe. S04c is the same fictitious walkthrough, captured two days earlier.</a:t>
             </a:r>
             <a:endParaRPr lang="en-US" dirty="0"/>
           </a:p>
@@ -2922,7 +2922,7 @@
                   <a:schemeClr val="tx1"/>
                 </a:solidFill>
               </a:rPr>
-              <a:t>ClamAV integration tested (refuses uploads when unavailable); to install with official signatures, mandatory before go-live.</a:t>
+              <a:t>ClamAV integration tested and shown on the demo with official signatures (S04d); to install on the production platform, mandatory before go-live.</a:t>
             </a:r>
             <a:endParaRPr lang="en-US" sz="1300" dirty="0"/>
           </a:p>
@@ -2958,7 +2958,7 @@
                   <a:schemeClr val="tx2"/>
                 </a:solidFill>
               </a:rPr>
-              <a:t>These items are specified or identified, not built (the antivirus integration is built and tested, not yet installed). No timeline is committed in this draft.</a:t>
+              <a:t>Specified or identified, not built (antivirus: built and shown on the demo, not in production). No timeline committed.</a:t>
             </a:r>
             <a:endParaRPr lang="en-US" sz="1300" dirty="0"/>
           </a:p>
@@ -11756,7 +11756,7 @@
                             <a:schemeClr val="tx1"/>
                           </a:solidFill>
                         </a:rPr>
-                        <a:t>Antivirus not installed in the demo</a:t>
+                        <a:t>Antivirus active on the demo only (S04d)</a:t>
                       </a:r>
                       <a:endParaRPr lang="en-US" sz="1300" dirty="0"/>
                     </a:p>

--- a/outputs/recap/MIPS-platform-BoM-EN-DRAFT.pptx
+++ b/outputs/recap/MIPS-platform-BoM-EN-DRAFT.pptx
@@ -116,13 +116,13 @@
   <p:extLst>
     <p:ext uri="{521415D9-36F7-43E2-AB2F-B90AF26B5E84}">
       <p14:sectionLst xmlns:p14="http://schemas.microsoft.com/office/powerpoint/2010/main">
-        <p14:section name="Overview" id="{5dd9d223-20ca-0f3d-f5cc-f3bebfccc7d3}">
+        <p14:section name="Overview" id="{8bb5c0a1-864a-adf7-6b90-47bd9a37ea4c}">
           <p14:sldIdLst>
             <p14:sldId id="256"/>
             <p14:sldId id="257"/>
           </p14:sldIdLst>
         </p14:section>
-        <p14:section name="Platform" id="{62108798-a0d6-a830-21dc-f7c796eaffd9}">
+        <p14:section name="Platform" id="{15f27ce4-8cc8-2f23-8c12-3bbdc526e33d}">
           <p14:sldIdLst>
             <p14:sldId id="258"/>
             <p14:sldId id="259"/>
@@ -130,7 +130,7 @@
             <p14:sldId id="261"/>
           </p14:sldIdLst>
         </p14:section>
-        <p14:section name="Funds and evidence" id="{6f7f51b0-8160-2bf6-d068-9f5810959001}">
+        <p14:section name="Funds and evidence" id="{ee72e49b-f3ca-a25a-fa5d-51dc02aac245}">
           <p14:sldIdLst>
             <p14:sldId id="262"/>
             <p14:sldId id="263"/>
@@ -1158,7 +1158,7 @@
           <a:p>
             <a:r>
               <a:rPr lang="en-US" dirty="0"/>
-              <a:t>INTERNAL — do not present as is. Model A matches current evidence (no intermediate account, fees invoiced, per-merchant acquirer agreements) but must be confirmed by Finance. Model B is not built. Keep one model on this slide, and check it against the safeguarding requirements of the Bank of Mauritius before submission.</a:t>
+              <a:t>INTERNAL. Gateway model (A) chosen by the CEO on 31 October; collection on behalf of merchants (B) is not pursued unless there is a clear commercial reason. Two blocking checks before submission: (1) Compliance: the licence category applied for must not require holding merchant funds; (2) Finance: no flow (MyT Money, Juice, bank transfer) may go through a MIPS account. Remove the TO CONFIRM tag only when both are confirmed.</a:t>
             </a:r>
             <a:endParaRPr lang="en-US" dirty="0"/>
           </a:p>
@@ -2302,7 +2302,7 @@
                   <a:schemeClr val="tx1"/>
                 </a:solidFill>
               </a:rPr>
-              <a:t>Daily bank-to-ledger-to-merchant-funds reconciliation, needed only if merchant funds are collected (model B).</a:t>
+              <a:t>Not applicable: no merchant funds are held (gateway model). Specified, not built, should funds ever be collected.</a:t>
             </a:r>
             <a:endParaRPr lang="en-US" sz="1300" dirty="0"/>
           </a:p>
@@ -3722,7 +3722,7 @@
                   <a:schemeClr val="tx1"/>
                 </a:solidFill>
               </a:rPr>
-              <a:t>Safeguarding (trust) reconciliation, transaction monitoring, disputes or complaints handling</a:t>
+              <a:t>Transaction monitoring, disputes or complaints handling</a:t>
             </a:r>
             <a:endParaRPr lang="en-US" sz="1400" dirty="0"/>
           </a:p>
@@ -9201,7 +9201,7 @@
                   <a:schemeClr val="tx1"/>
                 </a:solidFill>
               </a:rPr>
-              <a:t>Fund flow model</a:t>
+              <a:t>Fund flow: gateway model, no merchant funds held</a:t>
             </a:r>
             <a:endParaRPr lang="en-US" sz="3000" dirty="0"/>
           </a:p>
@@ -9215,8 +9215,8 @@
         </p:nvSpPr>
         <p:spPr>
           <a:xfrm>
-            <a:off x="6675120" y="411480"/>
-            <a:ext cx="5029200" cy="548640"/>
+            <a:off x="6309360" y="4983480"/>
+            <a:ext cx="5394960" cy="548640"/>
           </a:xfrm>
           <a:prstGeom prst="roundRect">
             <a:avLst>
@@ -9244,8 +9244,8 @@
         </p:nvSpPr>
         <p:spPr>
           <a:xfrm>
-            <a:off x="6675120" y="411480"/>
-            <a:ext cx="5029200" cy="548640"/>
+            <a:off x="6309360" y="4983480"/>
+            <a:ext cx="5394960" cy="548640"/>
           </a:xfrm>
           <a:prstGeom prst="rect">
             <a:avLst/>
@@ -9266,7 +9266,7 @@
                   <a:schemeClr val="accent6"/>
                 </a:solidFill>
               </a:rPr>
-              <a:t>DRAFT — keep only the model chosen before submission</a:t>
+              <a:t>TO CONFIRM: licence category and wallet flows</a:t>
             </a:r>
             <a:endParaRPr lang="en-US" sz="1300" dirty="0"/>
           </a:p>
@@ -9302,7 +9302,7 @@
                   <a:schemeClr val="accent2"/>
                 </a:solidFill>
               </a:rPr>
-              <a:t>A · Gateway: merchants are paid by the acquirer</a:t>
+              <a:t>Merchants are paid directly by the acquirer</a:t>
             </a:r>
             <a:endParaRPr lang="en-US" sz="1600" dirty="0"/>
           </a:p>
@@ -9849,10 +9849,10 @@
             <a:r>
               <a:rPr lang="en-US" sz="1600" b="1" dirty="0">
                 <a:solidFill>
-                  <a:schemeClr val="accent5"/>
-                </a:solidFill>
-              </a:rPr>
-              <a:t>B · Collection on behalf of merchants</a:t>
+                  <a:schemeClr val="accent4"/>
+                </a:solidFill>
+              </a:rPr>
+              <a:t>What this means for safeguarding</a:t>
             </a:r>
             <a:endParaRPr lang="en-US" sz="1600" dirty="0"/>
           </a:p>
@@ -9860,41 +9860,14 @@
       </p:sp>
       <p:sp>
         <p:nvSpPr>
-          <p:cNvPr id="22" name="b1"/>
-          <p:cNvSpPr/>
-          <p:nvPr/>
-        </p:nvSpPr>
-        <p:spPr>
-          <a:xfrm>
-            <a:off x="6309360" y="1783080"/>
-            <a:ext cx="1645920" cy="685800"/>
-          </a:xfrm>
-          <a:prstGeom prst="roundRect">
-            <a:avLst>
-              <a:gd name="adj" fmla="val 10667"/>
-            </a:avLst>
-          </a:prstGeom>
-          <a:solidFill>
-            <a:schemeClr val="bg2"/>
-          </a:solidFill>
-          <a:ln w="9525">
-            <a:solidFill>
-              <a:srgbClr val="C9D3DE"/>
-            </a:solidFill>
-            <a:prstDash val="solid"/>
-          </a:ln>
-        </p:spPr>
-      </p:sp>
-      <p:sp>
-        <p:nvSpPr>
-          <p:cNvPr id="23" name="Text 21"/>
+          <p:cNvPr id="22" name="Text 20"/>
           <p:cNvSpPr txBox="1"/>
           <p:nvPr/>
         </p:nvSpPr>
         <p:spPr>
           <a:xfrm>
-            <a:off x="6309360" y="1783080"/>
-            <a:ext cx="1645920" cy="685800"/>
+            <a:off x="6309360" y="1691640"/>
+            <a:ext cx="5486400" cy="3840480"/>
           </a:xfrm>
           <a:prstGeom prst="rect">
             <a:avLst/>
@@ -9903,506 +9876,7 @@
           <a:ln/>
         </p:spPr>
         <p:txBody>
-          <a:bodyPr wrap="square" lIns="1016" tIns="1016" rIns="1016" bIns="1016" rtlCol="0" anchor="ctr"/>
-          <a:lstStyle/>
-          <a:p>
-            <a:pPr algn="ctr" indent="0" marL="0">
-              <a:buNone/>
-            </a:pPr>
-            <a:r>
-              <a:rPr lang="en-US" sz="1300" dirty="0">
-                <a:solidFill>
-                  <a:schemeClr val="tx1"/>
-                </a:solidFill>
-              </a:rPr>
-              <a:t>Acquirer</a:t>
-            </a:r>
-            <a:endParaRPr lang="en-US" sz="1300" dirty="0"/>
-          </a:p>
-        </p:txBody>
-      </p:sp>
-      <p:sp>
-        <p:nvSpPr>
-          <p:cNvPr id="24" name="b2"/>
-          <p:cNvSpPr/>
-          <p:nvPr/>
-        </p:nvSpPr>
-        <p:spPr>
-          <a:xfrm>
-            <a:off x="8229600" y="1783080"/>
-            <a:ext cx="1645920" cy="685800"/>
-          </a:xfrm>
-          <a:prstGeom prst="roundRect">
-            <a:avLst>
-              <a:gd name="adj" fmla="val 10667"/>
-            </a:avLst>
-          </a:prstGeom>
-          <a:solidFill>
-            <a:schemeClr val="accent5">
-              <a:alpha val="20000"/>
-            </a:schemeClr>
-          </a:solidFill>
-          <a:ln w="9525">
-            <a:solidFill>
-              <a:schemeClr val="accent5"/>
-            </a:solidFill>
-            <a:prstDash val="solid"/>
-          </a:ln>
-        </p:spPr>
-      </p:sp>
-      <p:sp>
-        <p:nvSpPr>
-          <p:cNvPr id="25" name="Text 23"/>
-          <p:cNvSpPr txBox="1"/>
-          <p:nvPr/>
-        </p:nvSpPr>
-        <p:spPr>
-          <a:xfrm>
-            <a:off x="8229600" y="1783080"/>
-            <a:ext cx="1645920" cy="685800"/>
-          </a:xfrm>
-          <a:prstGeom prst="rect">
-            <a:avLst/>
-          </a:prstGeom>
-          <a:noFill/>
-          <a:ln/>
-        </p:spPr>
-        <p:txBody>
-          <a:bodyPr wrap="square" lIns="1016" tIns="1016" rIns="1016" bIns="1016" rtlCol="0" anchor="ctr"/>
-          <a:lstStyle/>
-          <a:p>
-            <a:pPr algn="ctr" indent="0" marL="0">
-              <a:buNone/>
-            </a:pPr>
-            <a:r>
-              <a:rPr lang="en-US" sz="1300" dirty="0">
-                <a:solidFill>
-                  <a:schemeClr val="tx1"/>
-                </a:solidFill>
-              </a:rPr>
-              <a:t>Trust account</a:t>
-            </a:r>
-            <a:endParaRPr lang="en-US" sz="1300" dirty="0"/>
-          </a:p>
-          <a:p>
-            <a:pPr algn="ctr" indent="0" marL="0">
-              <a:buNone/>
-            </a:pPr>
-            <a:r>
-              <a:rPr lang="en-US" sz="1300" dirty="0">
-                <a:solidFill>
-                  <a:schemeClr val="tx1"/>
-                </a:solidFill>
-              </a:rPr>
-              <a:t>MUR</a:t>
-            </a:r>
-            <a:endParaRPr lang="en-US" sz="1300" dirty="0"/>
-          </a:p>
-        </p:txBody>
-      </p:sp>
-      <p:sp>
-        <p:nvSpPr>
-          <p:cNvPr id="26" name="b3"/>
-          <p:cNvSpPr/>
-          <p:nvPr/>
-        </p:nvSpPr>
-        <p:spPr>
-          <a:xfrm>
-            <a:off x="10149840" y="1783080"/>
-            <a:ext cx="1645920" cy="685800"/>
-          </a:xfrm>
-          <a:prstGeom prst="roundRect">
-            <a:avLst>
-              <a:gd name="adj" fmla="val 10667"/>
-            </a:avLst>
-          </a:prstGeom>
-          <a:solidFill>
-            <a:schemeClr val="accent3">
-              <a:alpha val="15000"/>
-            </a:schemeClr>
-          </a:solidFill>
-          <a:ln w="9525">
-            <a:solidFill>
-              <a:schemeClr val="accent3"/>
-            </a:solidFill>
-            <a:prstDash val="solid"/>
-          </a:ln>
-        </p:spPr>
-      </p:sp>
-      <p:sp>
-        <p:nvSpPr>
-          <p:cNvPr id="27" name="Text 25"/>
-          <p:cNvSpPr txBox="1"/>
-          <p:nvPr/>
-        </p:nvSpPr>
-        <p:spPr>
-          <a:xfrm>
-            <a:off x="10149840" y="1783080"/>
-            <a:ext cx="1645920" cy="685800"/>
-          </a:xfrm>
-          <a:prstGeom prst="rect">
-            <a:avLst/>
-          </a:prstGeom>
-          <a:noFill/>
-          <a:ln/>
-        </p:spPr>
-        <p:txBody>
-          <a:bodyPr wrap="square" lIns="1016" tIns="1016" rIns="1016" bIns="1016" rtlCol="0" anchor="ctr"/>
-          <a:lstStyle/>
-          <a:p>
-            <a:pPr algn="ctr" indent="0" marL="0">
-              <a:buNone/>
-            </a:pPr>
-            <a:r>
-              <a:rPr lang="en-US" sz="1300" dirty="0">
-                <a:solidFill>
-                  <a:schemeClr val="tx1"/>
-                </a:solidFill>
-              </a:rPr>
-              <a:t>Merchants</a:t>
-            </a:r>
-            <a:endParaRPr lang="en-US" sz="1300" dirty="0"/>
-          </a:p>
-        </p:txBody>
-      </p:sp>
-      <p:sp>
-        <p:nvSpPr>
-          <p:cNvPr id="28" name="b4"/>
-          <p:cNvSpPr/>
-          <p:nvPr/>
-        </p:nvSpPr>
-        <p:spPr>
-          <a:xfrm>
-            <a:off x="8229600" y="3154680"/>
-            <a:ext cx="1645920" cy="685800"/>
-          </a:xfrm>
-          <a:prstGeom prst="roundRect">
-            <a:avLst>
-              <a:gd name="adj" fmla="val 10667"/>
-            </a:avLst>
-          </a:prstGeom>
-          <a:solidFill>
-            <a:schemeClr val="accent2">
-              <a:alpha val="15000"/>
-            </a:schemeClr>
-          </a:solidFill>
-          <a:ln w="9525">
-            <a:solidFill>
-              <a:schemeClr val="accent2"/>
-            </a:solidFill>
-            <a:prstDash val="solid"/>
-          </a:ln>
-        </p:spPr>
-      </p:sp>
-      <p:sp>
-        <p:nvSpPr>
-          <p:cNvPr id="29" name="Text 27"/>
-          <p:cNvSpPr txBox="1"/>
-          <p:nvPr/>
-        </p:nvSpPr>
-        <p:spPr>
-          <a:xfrm>
-            <a:off x="8229600" y="3154680"/>
-            <a:ext cx="1645920" cy="685800"/>
-          </a:xfrm>
-          <a:prstGeom prst="rect">
-            <a:avLst/>
-          </a:prstGeom>
-          <a:noFill/>
-          <a:ln/>
-        </p:spPr>
-        <p:txBody>
-          <a:bodyPr wrap="square" lIns="1016" tIns="1016" rIns="1016" bIns="1016" rtlCol="0" anchor="ctr"/>
-          <a:lstStyle/>
-          <a:p>
-            <a:pPr algn="ctr" indent="0" marL="0">
-              <a:buNone/>
-            </a:pPr>
-            <a:r>
-              <a:rPr lang="en-US" sz="1300" dirty="0">
-                <a:solidFill>
-                  <a:schemeClr val="tx1"/>
-                </a:solidFill>
-              </a:rPr>
-              <a:t>Operating</a:t>
-            </a:r>
-            <a:endParaRPr lang="en-US" sz="1300" dirty="0"/>
-          </a:p>
-          <a:p>
-            <a:pPr algn="ctr" indent="0" marL="0">
-              <a:buNone/>
-            </a:pPr>
-            <a:r>
-              <a:rPr lang="en-US" sz="1300" dirty="0">
-                <a:solidFill>
-                  <a:schemeClr val="tx1"/>
-                </a:solidFill>
-              </a:rPr>
-              <a:t>account</a:t>
-            </a:r>
-            <a:endParaRPr lang="en-US" sz="1300" dirty="0"/>
-          </a:p>
-        </p:txBody>
-      </p:sp>
-      <p:sp>
-        <p:nvSpPr>
-          <p:cNvPr id="30" name="Shape 28"/>
-          <p:cNvSpPr/>
-          <p:nvPr/>
-        </p:nvSpPr>
-        <p:spPr>
-          <a:xfrm>
-            <a:off x="7973568" y="2121408"/>
-            <a:ext cx="237744" cy="0"/>
-          </a:xfrm>
-          <a:prstGeom prst="line">
-            <a:avLst/>
-          </a:prstGeom>
-          <a:noFill/>
-          <a:ln w="19050">
-            <a:solidFill>
-              <a:schemeClr val="tx2"/>
-            </a:solidFill>
-            <a:prstDash val="solid"/>
-            <a:tailEnd type="triangle"/>
-          </a:ln>
-        </p:spPr>
-      </p:sp>
-      <p:sp>
-        <p:nvSpPr>
-          <p:cNvPr id="31" name="Text 29"/>
-          <p:cNvSpPr txBox="1"/>
-          <p:nvPr/>
-        </p:nvSpPr>
-        <p:spPr>
-          <a:xfrm>
-            <a:off x="7589520" y="1508760"/>
-            <a:ext cx="1005840" cy="274320"/>
-          </a:xfrm>
-          <a:prstGeom prst="rect">
-            <a:avLst/>
-          </a:prstGeom>
-          <a:noFill/>
-          <a:ln/>
-        </p:spPr>
-        <p:txBody>
-          <a:bodyPr wrap="square" lIns="0" tIns="0" rIns="0" bIns="0" rtlCol="0" anchor="t"/>
-          <a:lstStyle/>
-          <a:p>
-            <a:pPr algn="ctr" indent="0" marL="0">
-              <a:buNone/>
-            </a:pPr>
-            <a:r>
-              <a:rPr lang="en-US" sz="1100" dirty="0">
-                <a:solidFill>
-                  <a:schemeClr val="tx2"/>
-                </a:solidFill>
-              </a:rPr>
-              <a:t>gross, D+1</a:t>
-            </a:r>
-            <a:endParaRPr lang="en-US" sz="1100" dirty="0"/>
-          </a:p>
-        </p:txBody>
-      </p:sp>
-      <p:sp>
-        <p:nvSpPr>
-          <p:cNvPr id="32" name="Shape 30"/>
-          <p:cNvSpPr/>
-          <p:nvPr/>
-        </p:nvSpPr>
-        <p:spPr>
-          <a:xfrm>
-            <a:off x="9893808" y="2121408"/>
-            <a:ext cx="237744" cy="0"/>
-          </a:xfrm>
-          <a:prstGeom prst="line">
-            <a:avLst/>
-          </a:prstGeom>
-          <a:noFill/>
-          <a:ln w="19050">
-            <a:solidFill>
-              <a:schemeClr val="tx2"/>
-            </a:solidFill>
-            <a:prstDash val="solid"/>
-            <a:tailEnd type="triangle"/>
-          </a:ln>
-        </p:spPr>
-      </p:sp>
-      <p:sp>
-        <p:nvSpPr>
-          <p:cNvPr id="33" name="Text 31"/>
-          <p:cNvSpPr txBox="1"/>
-          <p:nvPr/>
-        </p:nvSpPr>
-        <p:spPr>
-          <a:xfrm>
-            <a:off x="9509760" y="1508760"/>
-            <a:ext cx="1005840" cy="274320"/>
-          </a:xfrm>
-          <a:prstGeom prst="rect">
-            <a:avLst/>
-          </a:prstGeom>
-          <a:noFill/>
-          <a:ln/>
-        </p:spPr>
-        <p:txBody>
-          <a:bodyPr wrap="square" lIns="0" tIns="0" rIns="0" bIns="0" rtlCol="0" anchor="t"/>
-          <a:lstStyle/>
-          <a:p>
-            <a:pPr algn="ctr" indent="0" marL="0">
-              <a:buNone/>
-            </a:pPr>
-            <a:r>
-              <a:rPr lang="en-US" sz="1100" dirty="0">
-                <a:solidFill>
-                  <a:schemeClr val="tx2"/>
-                </a:solidFill>
-              </a:rPr>
-              <a:t>net, D+1</a:t>
-            </a:r>
-            <a:endParaRPr lang="en-US" sz="1100" dirty="0"/>
-          </a:p>
-        </p:txBody>
-      </p:sp>
-      <p:sp>
-        <p:nvSpPr>
-          <p:cNvPr id="34" name="Shape 32"/>
-          <p:cNvSpPr/>
-          <p:nvPr/>
-        </p:nvSpPr>
-        <p:spPr>
-          <a:xfrm>
-            <a:off x="8778240" y="2487168"/>
-            <a:ext cx="0" cy="649224"/>
-          </a:xfrm>
-          <a:prstGeom prst="line">
-            <a:avLst/>
-          </a:prstGeom>
-          <a:noFill/>
-          <a:ln w="19050">
-            <a:solidFill>
-              <a:schemeClr val="tx2"/>
-            </a:solidFill>
-            <a:prstDash val="solid"/>
-            <a:tailEnd type="triangle"/>
-          </a:ln>
-        </p:spPr>
-      </p:sp>
-      <p:sp>
-        <p:nvSpPr>
-          <p:cNvPr id="35" name="Text 33"/>
-          <p:cNvSpPr txBox="1"/>
-          <p:nvPr/>
-        </p:nvSpPr>
-        <p:spPr>
-          <a:xfrm>
-            <a:off x="7680960" y="2697480"/>
-            <a:ext cx="1051560" cy="274320"/>
-          </a:xfrm>
-          <a:prstGeom prst="rect">
-            <a:avLst/>
-          </a:prstGeom>
-          <a:noFill/>
-          <a:ln/>
-        </p:spPr>
-        <p:txBody>
-          <a:bodyPr wrap="square" lIns="0" tIns="0" rIns="0" bIns="0" rtlCol="0" anchor="t"/>
-          <a:lstStyle/>
-          <a:p>
-            <a:pPr algn="r" indent="0" marL="0">
-              <a:buNone/>
-            </a:pPr>
-            <a:r>
-              <a:rPr lang="en-US" sz="1100" dirty="0">
-                <a:solidFill>
-                  <a:schemeClr val="tx2"/>
-                </a:solidFill>
-              </a:rPr>
-              <a:t>fees</a:t>
-            </a:r>
-            <a:endParaRPr lang="en-US" sz="1100" dirty="0"/>
-          </a:p>
-        </p:txBody>
-      </p:sp>
-      <p:sp>
-        <p:nvSpPr>
-          <p:cNvPr id="36" name="Shape 34"/>
-          <p:cNvSpPr/>
-          <p:nvPr/>
-        </p:nvSpPr>
-        <p:spPr>
-          <a:xfrm flipV="1">
-            <a:off x="9326880" y="2487168"/>
-            <a:ext cx="0" cy="649224"/>
-          </a:xfrm>
-          <a:prstGeom prst="line">
-            <a:avLst/>
-          </a:prstGeom>
-          <a:noFill/>
-          <a:ln w="19050">
-            <a:solidFill>
-              <a:schemeClr val="tx2"/>
-            </a:solidFill>
-            <a:prstDash val="dash"/>
-            <a:tailEnd type="triangle"/>
-          </a:ln>
-        </p:spPr>
-      </p:sp>
-      <p:sp>
-        <p:nvSpPr>
-          <p:cNvPr id="37" name="Text 35"/>
-          <p:cNvSpPr txBox="1"/>
-          <p:nvPr/>
-        </p:nvSpPr>
-        <p:spPr>
-          <a:xfrm>
-            <a:off x="9372600" y="2697480"/>
-            <a:ext cx="1280160" cy="274320"/>
-          </a:xfrm>
-          <a:prstGeom prst="rect">
-            <a:avLst/>
-          </a:prstGeom>
-          <a:noFill/>
-          <a:ln/>
-        </p:spPr>
-        <p:txBody>
-          <a:bodyPr wrap="square" lIns="0" tIns="0" rIns="0" bIns="0" rtlCol="0" anchor="t"/>
-          <a:lstStyle/>
-          <a:p>
-            <a:pPr algn="l" indent="0" marL="0">
-              <a:buNone/>
-            </a:pPr>
-            <a:r>
-              <a:rPr lang="en-US" sz="1100" dirty="0">
-                <a:solidFill>
-                  <a:schemeClr val="tx2"/>
-                </a:solidFill>
-              </a:rPr>
-              <a:t>shortfall cover</a:t>
-            </a:r>
-            <a:endParaRPr lang="en-US" sz="1100" dirty="0"/>
-          </a:p>
-        </p:txBody>
-      </p:sp>
-      <p:sp>
-        <p:nvSpPr>
-          <p:cNvPr id="38" name="Text 36"/>
-          <p:cNvSpPr txBox="1"/>
-          <p:nvPr/>
-        </p:nvSpPr>
-        <p:spPr>
-          <a:xfrm>
-            <a:off x="6309360" y="4069080"/>
-            <a:ext cx="5486400" cy="1463040"/>
-          </a:xfrm>
-          <a:prstGeom prst="rect">
-            <a:avLst/>
-          </a:prstGeom>
-          <a:noFill/>
-          <a:ln/>
-        </p:spPr>
-        <p:txBody>
-          <a:bodyPr wrap="square" lIns="635" tIns="635" rIns="635" bIns="635" rtlCol="0" anchor="ctr"/>
+          <a:bodyPr wrap="square" lIns="635" tIns="635" rIns="635" bIns="635" rtlCol="0" anchor="t"/>
           <a:lstStyle/>
           <a:p>
             <a:pPr marL="342900" indent="-342900">
@@ -10418,7 +9892,7 @@
                   <a:schemeClr val="tx1"/>
                 </a:solidFill>
               </a:rPr>
-              <a:t>Merchant funds held in a segregated trust account</a:t>
+              <a:t>Settlement goes from the acquirer to each merchant's own bank account</a:t>
             </a:r>
             <a:endParaRPr lang="en-US" sz="1300" dirty="0"/>
           </a:p>
@@ -10436,7 +9910,7 @@
                   <a:schemeClr val="tx1"/>
                 </a:solidFill>
               </a:rPr>
-              <a:t>Daily safeguarding reconciliation, four-eyes sign-off</a:t>
+              <a:t>SPIN/MIPS never receives or holds merchant funds: there is no trust account to safeguard or reconcile</a:t>
             </a:r>
             <a:endParaRPr lang="en-US" sz="1300" dirty="0"/>
           </a:p>
@@ -10454,15 +9928,33 @@
                   <a:schemeClr val="tx1"/>
                 </a:solidFill>
               </a:rPr>
-              <a:t>Requires aggregation agreements with acquirers</a:t>
+              <a:t>MIPS fees are invoiced to merchants monthly, not deducted from settlements</a:t>
             </a:r>
             <a:endParaRPr lang="en-US" sz="1300" dirty="0"/>
           </a:p>
-        </p:txBody>
-      </p:sp>
-      <p:sp>
-        <p:nvSpPr>
-          <p:cNvPr id="39" name="Shape 37"/>
+          <a:p>
+            <a:pPr marL="342900" indent="-342900">
+              <a:spcAft>
+                <a:spcPts val="600"/>
+              </a:spcAft>
+              <a:buSzPct val="100000"/>
+              <a:buChar char="•"/>
+            </a:pPr>
+            <a:r>
+              <a:rPr lang="en-US" sz="1300" dirty="0">
+                <a:solidFill>
+                  <a:schemeClr val="tx1"/>
+                </a:solidFill>
+              </a:rPr>
+              <a:t>Collecting funds on behalf of merchants is not part of this application; it would require a safeguarding arrangement and daily reconciliation first</a:t>
+            </a:r>
+            <a:endParaRPr lang="en-US" sz="1300" dirty="0"/>
+          </a:p>
+        </p:txBody>
+      </p:sp>
+      <p:sp>
+        <p:nvSpPr>
+          <p:cNvPr id="23" name="Shape 21"/>
           <p:cNvSpPr/>
           <p:nvPr/>
         </p:nvSpPr>
